--- a/Agent365-PoV-Deck.pptx
+++ b/Agent365-PoV-Deck.pptx
@@ -50,7 +50,7 @@
     <p:sldId id="298" r:id="rId50"/>
     <p:sldId id="299" r:id="rId51"/>
   </p:sldIdLst>
-  <p:sldSz cx="12191695" cy="6858000" type="screen4x3"/>
+  <p:sldSz cx="12192000" cy="6858000" type="screen4x3"/>
   <p:notesSz cx="6858000" cy="9144000"/>
   <p:defaultTextStyle>
     <a:defPPr>
@@ -6369,7 +6369,7 @@
         <p:spPr>
           <a:xfrm>
             <a:off x="0" y="0"/>
-            <a:ext cx="12191695" cy="6858000"/>
+            <a:ext cx="12192000" cy="6858000"/>
           </a:xfrm>
           <a:prstGeom prst="rect">
             <a:avLst/>
@@ -7042,7 +7042,7 @@
         <p:spPr>
           <a:xfrm>
             <a:off x="0" y="0"/>
-            <a:ext cx="12191695" cy="6858000"/>
+            <a:ext cx="12192000" cy="6858000"/>
           </a:xfrm>
           <a:prstGeom prst="rect">
             <a:avLst/>
@@ -8783,7 +8783,7 @@
         <p:spPr>
           <a:xfrm>
             <a:off x="0" y="0"/>
-            <a:ext cx="12191695" cy="6858000"/>
+            <a:ext cx="12192000" cy="6858000"/>
           </a:xfrm>
           <a:prstGeom prst="rect">
             <a:avLst/>
@@ -10880,7 +10880,7 @@
         <p:spPr>
           <a:xfrm>
             <a:off x="0" y="0"/>
-            <a:ext cx="12191695" cy="6858000"/>
+            <a:ext cx="12192000" cy="6858000"/>
           </a:xfrm>
           <a:prstGeom prst="rect">
             <a:avLst/>
@@ -12621,7 +12621,7 @@
         <p:spPr>
           <a:xfrm>
             <a:off x="0" y="0"/>
-            <a:ext cx="12191695" cy="6858000"/>
+            <a:ext cx="12192000" cy="6858000"/>
           </a:xfrm>
           <a:prstGeom prst="rect">
             <a:avLst/>
@@ -15116,7 +15116,7 @@
         <p:spPr>
           <a:xfrm>
             <a:off x="0" y="0"/>
-            <a:ext cx="12191695" cy="6858000"/>
+            <a:ext cx="12192000" cy="6858000"/>
           </a:xfrm>
           <a:prstGeom prst="rect">
             <a:avLst/>
@@ -16857,7 +16857,7 @@
         <p:spPr>
           <a:xfrm>
             <a:off x="0" y="0"/>
-            <a:ext cx="12191695" cy="6858000"/>
+            <a:ext cx="12192000" cy="6858000"/>
           </a:xfrm>
           <a:prstGeom prst="rect">
             <a:avLst/>
@@ -18640,7 +18640,7 @@
         <p:spPr>
           <a:xfrm>
             <a:off x="0" y="0"/>
-            <a:ext cx="12191695" cy="6858000"/>
+            <a:ext cx="12192000" cy="6858000"/>
           </a:xfrm>
           <a:prstGeom prst="rect">
             <a:avLst/>
@@ -20109,7 +20109,7 @@
         <p:spPr>
           <a:xfrm>
             <a:off x="0" y="0"/>
-            <a:ext cx="12191695" cy="6858000"/>
+            <a:ext cx="12192000" cy="6858000"/>
           </a:xfrm>
           <a:prstGeom prst="rect">
             <a:avLst/>

--- a/Agent365-PoV-Deck.pptx
+++ b/Agent365-PoV-Deck.pptx
@@ -49,6 +49,8 @@
     <p:sldId id="297" r:id="rId49"/>
     <p:sldId id="298" r:id="rId50"/>
     <p:sldId id="299" r:id="rId51"/>
+    <p:sldId id="300" r:id="rId52"/>
+    <p:sldId id="301" r:id="rId53"/>
   </p:sldIdLst>
   <p:sldSz cx="12192000" cy="6858000" type="screen4x3"/>
   <p:notesSz cx="6858000" cy="9144000"/>
@@ -1707,7 +1709,13 @@
           <a:lstStyle/>
           <a:p>
             <a:r>
-              <a:t>Here's a scenario playing out right now: your compliance team passes an audit, but the auditor asks, "What about your AI agents?" If you can't answer that in the same compliance framework they already trust, you have a finding.</a:t>
+              <a:t>Advanced hunting gives your SOC team the ability to proactively query agent data alongside all other Defender XDR telemetry. The AIAgentsInfo table surfaces your full Agent 365 inventory — enabling threat hunters to identify misconfigurations, risky agents, and security gaps before they become incidents.</a:t>
+            </a:r>
+          </a:p>
+          <a:p/>
+          <a:p>
+            <a:r>
+              <a:t>Detailed procedure: demo-steps.md, UC4 Step 10</a:t>
             </a:r>
           </a:p>
         </p:txBody>
@@ -1777,13 +1785,34 @@
           <a:lstStyle/>
           <a:p>
             <a:r>
-              <a:t>We'll walk through the full lifecycle of an agent in audit terms. You'll see the trail from deployment through every action it took. Then we'll execute a lifecycle drill — blocking, deactivating, and deleting — verifying each action is audited.</a:t>
+              <a:t>Four key hunting queries that demonstrate proactive security posture management:</a:t>
             </a:r>
           </a:p>
           <a:p/>
           <a:p>
             <a:r>
-              <a:t>Detailed procedure: demo-steps.md, UC5</a:t>
+              <a:t>1. List All Agents — Visibility into the full agent inventory from within the SOC console.</a:t>
+            </a:r>
+          </a:p>
+          <a:p>
+            <a:r>
+              <a:t>2. Agents Without Instructions — High-risk: vulnerable to prompt injection without defined behavioral boundaries. Recommendation: ensure all agents have well-defined instructions.</a:t>
+            </a:r>
+          </a:p>
+          <a:p>
+            <a:r>
+              <a:t>3. MCP Tools Configured — MCP extends capabilities but introduces security considerations. Recommendation: confirm tools are required, review for least privilege, remove unnecessary tools.</a:t>
+            </a:r>
+          </a:p>
+          <a:p>
+            <a:r>
+              <a:t>4. Non-HTTPS Endpoints — Exposes data to interception/tampering. Recommendation: update all HTTP actions to HTTPS.</a:t>
+            </a:r>
+          </a:p>
+          <a:p/>
+          <a:p>
+            <a:r>
+              <a:t>These queries shift the SOC from reactive alerting to proactive posture management for AI agents.</a:t>
             </a:r>
           </a:p>
         </p:txBody>
@@ -1853,7 +1882,7 @@
           <a:lstStyle/>
           <a:p>
             <a:r>
-              <a:t>Success here means an auditor can pick up the compliance report, see agent activities alongside user activities, and trace any agent's full history from deployment to deletion.</a:t>
+              <a:t>Here's a scenario playing out right now: your compliance team passes an audit, but the auditor asks, "What about your AI agents?" If you can't answer that in the same compliance framework they already trust, you have a finding.</a:t>
             </a:r>
           </a:p>
         </p:txBody>
@@ -1923,60 +1952,13 @@
           <a:lstStyle/>
           <a:p>
             <a:r>
-              <a:t>The power here is trust. Your auditors already accept evidence from M365 compliance tools. Agent activities feed that same system.</a:t>
+              <a:t>We'll walk through the full lifecycle of an agent in audit terms. You'll see the trail from deployment through every action it took. Then we'll execute a lifecycle drill — blocking, deactivating, and deleting — verifying each action is audited.</a:t>
             </a:r>
           </a:p>
           <a:p/>
           <a:p>
             <a:r>
-              <a:t>CISO Talking Points:</a:t>
-            </a:r>
-          </a:p>
-          <a:p>
-            <a:r>
-              <a:t>- "Agent lifecycle events are captured in the same unified audit log your compliance team already queries."</a:t>
-            </a:r>
-          </a:p>
-          <a:p>
-            <a:r>
-              <a:t>- "Retention policies that apply to human activity audit data apply to agent activity audit data."</a:t>
-            </a:r>
-          </a:p>
-          <a:p>
-            <a:r>
-              <a:t>- "When auditors ask 'how do you govern agents?', the answer is 'the same way we govern everything else.'"</a:t>
-            </a:r>
-          </a:p>
-          <a:p/>
-          <a:p>
-            <a:r>
-              <a:t>CIO Talking Points:</a:t>
-            </a:r>
-          </a:p>
-          <a:p>
-            <a:r>
-              <a:t>- "No new compliance tooling procurement. Agent audit evidence lives in existing M365 compliance infrastructure."</a:t>
-            </a:r>
-          </a:p>
-          <a:p>
-            <a:r>
-              <a:t>- "Your compliance team doesn't need new skills or certifications."</a:t>
-            </a:r>
-          </a:p>
-          <a:p>
-            <a:r>
-              <a:t>- "Audit preparation cost doesn't increase with agent adoption."</a:t>
-            </a:r>
-          </a:p>
-          <a:p/>
-          <a:p>
-            <a:r>
-              <a:t>If asked about auditor unfamiliarity: They'll question it less if it's in a system they already trust.</a:t>
-            </a:r>
-          </a:p>
-          <a:p>
-            <a:r>
-              <a:t>If asked about agent-specific reports: The unified audit log supports filtered queries for agent-specific views.</a:t>
+              <a:t>Detailed procedure: demo-steps.md, UC5</a:t>
             </a:r>
           </a:p>
         </p:txBody>
@@ -2046,7 +2028,7 @@
           <a:lstStyle/>
           <a:p>
             <a:r>
-              <a:t>Technically, every agent action writes to the same unified audit log as user actions — same schema, same retention handling. When an agent changes lifecycle state, compliance workflows fire automatically.</a:t>
+              <a:t>Success here means an auditor can pick up the compliance report, see agent activities alongside user activities, and trace any agent's full history from deployment to deletion.</a:t>
             </a:r>
           </a:p>
         </p:txBody>
@@ -2116,7 +2098,60 @@
           <a:lstStyle/>
           <a:p>
             <a:r>
-              <a:t>Your users interact with AI agents inside the apps they use every day — Outlook, Teams, Word, SharePoint. But are those agent interactions governed? Agent 365 enables real-time allow/block enforcement within the productivity surface.</a:t>
+              <a:t>The power here is trust. Your auditors already accept evidence from M365 compliance tools. Agent activities feed that same system.</a:t>
+            </a:r>
+          </a:p>
+          <a:p/>
+          <a:p>
+            <a:r>
+              <a:t>CISO Talking Points:</a:t>
+            </a:r>
+          </a:p>
+          <a:p>
+            <a:r>
+              <a:t>- "Agent lifecycle events are captured in the same unified audit log your compliance team already queries."</a:t>
+            </a:r>
+          </a:p>
+          <a:p>
+            <a:r>
+              <a:t>- "Retention policies that apply to human activity audit data apply to agent activity audit data."</a:t>
+            </a:r>
+          </a:p>
+          <a:p>
+            <a:r>
+              <a:t>- "When auditors ask 'how do you govern agents?', the answer is 'the same way we govern everything else.'"</a:t>
+            </a:r>
+          </a:p>
+          <a:p/>
+          <a:p>
+            <a:r>
+              <a:t>CIO Talking Points:</a:t>
+            </a:r>
+          </a:p>
+          <a:p>
+            <a:r>
+              <a:t>- "No new compliance tooling procurement. Agent audit evidence lives in existing M365 compliance infrastructure."</a:t>
+            </a:r>
+          </a:p>
+          <a:p>
+            <a:r>
+              <a:t>- "Your compliance team doesn't need new skills or certifications."</a:t>
+            </a:r>
+          </a:p>
+          <a:p>
+            <a:r>
+              <a:t>- "Audit preparation cost doesn't increase with agent adoption."</a:t>
+            </a:r>
+          </a:p>
+          <a:p/>
+          <a:p>
+            <a:r>
+              <a:t>If asked about auditor unfamiliarity: They'll question it less if it's in a system they already trust.</a:t>
+            </a:r>
+          </a:p>
+          <a:p>
+            <a:r>
+              <a:t>If asked about agent-specific reports: The unified audit log supports filtered queries for agent-specific views.</a:t>
             </a:r>
           </a:p>
         </p:txBody>
@@ -2186,13 +2221,7 @@
           <a:lstStyle/>
           <a:p>
             <a:r>
-              <a:t>We'll deploy a test agent connected to Teams and SharePoint, configure policies, and demonstrate both allowed and blocked actions in real time.</a:t>
-            </a:r>
-          </a:p>
-          <a:p/>
-          <a:p>
-            <a:r>
-              <a:t>Detailed procedure: demo-steps.md, UC6</a:t>
+              <a:t>Technically, every agent action writes to the same unified audit log as user actions — same schema, same retention handling. When an agent changes lifecycle state, compliance workflows fire automatically.</a:t>
             </a:r>
           </a:p>
         </p:txBody>
@@ -2262,7 +2291,7 @@
           <a:lstStyle/>
           <a:p>
             <a:r>
-              <a:t>We need to prove three things: allowed actions work smoothly, blocked actions are denied instantly, and policy changes take effect without requiring agent redeployment.</a:t>
+              <a:t>Your users interact with AI agents inside the apps they use every day — Outlook, Teams, Word, SharePoint. But are those agent interactions governed? Agent 365 enables real-time allow/block enforcement within the productivity surface.</a:t>
             </a:r>
           </a:p>
         </p:txBody>
@@ -2402,60 +2431,13 @@
           <a:lstStyle/>
           <a:p>
             <a:r>
-              <a:t>The differentiator is seamlessness. Your users don't need a new app, a browser extension, or a sidebar.</a:t>
+              <a:t>We'll deploy a test agent connected to Teams and SharePoint, configure policies, and demonstrate both allowed and blocked actions in real time.</a:t>
             </a:r>
           </a:p>
           <a:p/>
           <a:p>
             <a:r>
-              <a:t>CISO Talking Points:</a:t>
-            </a:r>
-          </a:p>
-          <a:p>
-            <a:r>
-              <a:t>- "Agents in familiar surfaces means users follow established security behaviors."</a:t>
-            </a:r>
-          </a:p>
-          <a:p>
-            <a:r>
-              <a:t>- "No new client application means no new attack surface to secure, patch, or monitor."</a:t>
-            </a:r>
-          </a:p>
-          <a:p>
-            <a:r>
-              <a:t>- "Security controls that apply to Teams and M365 apps apply to agent interactions within them."</a:t>
-            </a:r>
-          </a:p>
-          <a:p/>
-          <a:p>
-            <a:r>
-              <a:t>CIO Talking Points:</a:t>
-            </a:r>
-          </a:p>
-          <a:p>
-            <a:r>
-              <a:t>- "Adoption cost is near zero. Users interact with agents in Teams and M365 apps they already use daily."</a:t>
-            </a:r>
-          </a:p>
-          <a:p>
-            <a:r>
-              <a:t>- "No client deployment project. No MDM profile updates."</a:t>
-            </a:r>
-          </a:p>
-          <a:p>
-            <a:r>
-              <a:t>- "IT admin overhead is configuration, not infrastructure."</a:t>
-            </a:r>
-          </a:p>
-          <a:p/>
-          <a:p>
-            <a:r>
-              <a:t>If asked about specialized interfaces: Adaptive Cards in Teams support complex workflows without leaving the familiar surface.</a:t>
-            </a:r>
-          </a:p>
-          <a:p>
-            <a:r>
-              <a:t>If asked about controlling visibility: Agent visibility controlled through same Teams app permission policies and Entra ID group assignments.</a:t>
+              <a:t>Detailed procedure: demo-steps.md, UC6</a:t>
             </a:r>
           </a:p>
         </p:txBody>
@@ -2525,7 +2507,7 @@
           <a:lstStyle/>
           <a:p>
             <a:r>
-              <a:t>Let's bring it all together. Over these weeks, we proved that Agent 365 delivers real, measurable governance across every dimension. And we did it using the tools and frameworks your teams already operate. No new consoles, no parallel systems, no learning curve.</a:t>
+              <a:t>We need to prove three things: allowed actions work smoothly, blocked actions are denied instantly, and policy changes take effect without requiring agent redeployment.</a:t>
             </a:r>
           </a:p>
         </p:txBody>
@@ -2595,7 +2577,60 @@
           <a:lstStyle/>
           <a:p>
             <a:r>
-              <a:t>The PoV proved the technology works with your agents in your environment. The next step is broader rollout — extending governance to your full agent estate, integrating with change management, and enabling self-service registration.</a:t>
+              <a:t>The differentiator is seamlessness. Your users don't need a new app, a browser extension, or a sidebar.</a:t>
+            </a:r>
+          </a:p>
+          <a:p/>
+          <a:p>
+            <a:r>
+              <a:t>CISO Talking Points:</a:t>
+            </a:r>
+          </a:p>
+          <a:p>
+            <a:r>
+              <a:t>- "Agents in familiar surfaces means users follow established security behaviors."</a:t>
+            </a:r>
+          </a:p>
+          <a:p>
+            <a:r>
+              <a:t>- "No new client application means no new attack surface to secure, patch, or monitor."</a:t>
+            </a:r>
+          </a:p>
+          <a:p>
+            <a:r>
+              <a:t>- "Security controls that apply to Teams and M365 apps apply to agent interactions within them."</a:t>
+            </a:r>
+          </a:p>
+          <a:p/>
+          <a:p>
+            <a:r>
+              <a:t>CIO Talking Points:</a:t>
+            </a:r>
+          </a:p>
+          <a:p>
+            <a:r>
+              <a:t>- "Adoption cost is near zero. Users interact with agents in Teams and M365 apps they already use daily."</a:t>
+            </a:r>
+          </a:p>
+          <a:p>
+            <a:r>
+              <a:t>- "No client deployment project. No MDM profile updates."</a:t>
+            </a:r>
+          </a:p>
+          <a:p>
+            <a:r>
+              <a:t>- "IT admin overhead is configuration, not infrastructure."</a:t>
+            </a:r>
+          </a:p>
+          <a:p/>
+          <a:p>
+            <a:r>
+              <a:t>If asked about specialized interfaces: Adaptive Cards in Teams support complex workflows without leaving the familiar surface.</a:t>
+            </a:r>
+          </a:p>
+          <a:p>
+            <a:r>
+              <a:t>If asked about controlling visibility: Agent visibility controlled through same Teams app permission policies and Entra ID group assignments.</a:t>
             </a:r>
           </a:p>
         </p:txBody>
@@ -2665,7 +2700,7 @@
           <a:lstStyle/>
           <a:p>
             <a:r>
-              <a:t>Thank you for your time and partnership throughout this Proof of Value. Your account team is here to support next steps. We'll deliver the formal PoV completion report within one week of engagement close. Let's govern your agents the way you govern your people.</a:t>
+              <a:t>Let's bring it all together. Over these weeks, we proved that Agent 365 delivers real, measurable governance across every dimension. And we did it using the tools and frameworks your teams already operate. No new consoles, no parallel systems, no learning curve.</a:t>
             </a:r>
           </a:p>
         </p:txBody>
@@ -2735,7 +2770,7 @@
           <a:lstStyle/>
           <a:p>
             <a:r>
-              <a:t>Reference slide: Roles involved in the Agent 365 Proof of Value engagement.</a:t>
+              <a:t>The PoV proved the technology works with your agents in your environment. The next step is broader rollout — extending governance to your full agent estate, integrating with change management, and enabling self-service registration.</a:t>
             </a:r>
           </a:p>
         </p:txBody>
@@ -2805,7 +2840,7 @@
           <a:lstStyle/>
           <a:p>
             <a:r>
-              <a:t>Reference slide: Agent types supported in the Agent 365 PoV. Note: Agent 365 is the governance capability set within Microsoft 365 — not a separately licensed product.</a:t>
+              <a:t>Thank you for your time and partnership throughout this Proof of Value. Your account team is here to support next steps. We'll deliver the formal PoV completion report within one week of engagement close. Let's govern your agents the way you govern your people.</a:t>
             </a:r>
           </a:p>
         </p:txBody>
@@ -2831,6 +2866,146 @@
 </file>
 
 <file path=ppt/notesSlides/notesSlide36.xml><?xml version="1.0" encoding="utf-8"?>
+<p:notes xmlns:a="http://schemas.openxmlformats.org/drawingml/2006/main" xmlns:p="http://schemas.openxmlformats.org/presentationml/2006/main" xmlns:r="http://schemas.openxmlformats.org/officeDocument/2006/relationships">
+  <p:cSld>
+    <p:spTree>
+      <p:nvGrpSpPr>
+        <p:cNvPr id="1" name=""/>
+        <p:cNvGrpSpPr/>
+        <p:nvPr/>
+      </p:nvGrpSpPr>
+      <p:grpSpPr>
+        <a:xfrm>
+          <a:off x="0" y="0"/>
+          <a:ext cx="0" cy="0"/>
+          <a:chOff x="0" y="0"/>
+          <a:chExt cx="0" cy="0"/>
+        </a:xfrm>
+      </p:grpSpPr>
+      <p:sp>
+        <p:nvSpPr>
+          <p:cNvPr id="2" name="Slide Image Placeholder 1"/>
+          <p:cNvSpPr>
+            <a:spLocks noGrp="1"/>
+          </p:cNvSpPr>
+          <p:nvPr>
+            <p:ph type="sldImg" idx="2"/>
+          </p:nvPr>
+        </p:nvSpPr>
+        <p:spPr/>
+      </p:sp>
+      <p:sp>
+        <p:nvSpPr>
+          <p:cNvPr id="3" name="Notes Placeholder 2"/>
+          <p:cNvSpPr>
+            <a:spLocks noGrp="1"/>
+          </p:cNvSpPr>
+          <p:nvPr>
+            <p:ph type="body" idx="3" sz="quarter"/>
+          </p:nvPr>
+        </p:nvSpPr>
+        <p:spPr/>
+        <p:txBody>
+          <a:bodyPr/>
+          <a:lstStyle/>
+          <a:p>
+            <a:r>
+              <a:t>Reference slide: Roles involved in the Agent 365 Proof of Value engagement.</a:t>
+            </a:r>
+          </a:p>
+        </p:txBody>
+      </p:sp>
+      <p:sp>
+        <p:nvSpPr>
+          <p:cNvPr id="4" name="Slide Number Placeholder 3"/>
+          <p:cNvSpPr>
+            <a:spLocks noGrp="1"/>
+          </p:cNvSpPr>
+          <p:nvPr>
+            <p:ph type="sldNum" idx="5" sz="quarter"/>
+          </p:nvPr>
+        </p:nvSpPr>
+        <p:spPr/>
+      </p:sp>
+    </p:spTree>
+  </p:cSld>
+  <p:clrMapOvr>
+    <a:masterClrMapping/>
+  </p:clrMapOvr>
+</p:notes>
+</file>
+
+<file path=ppt/notesSlides/notesSlide37.xml><?xml version="1.0" encoding="utf-8"?>
+<p:notes xmlns:a="http://schemas.openxmlformats.org/drawingml/2006/main" xmlns:p="http://schemas.openxmlformats.org/presentationml/2006/main" xmlns:r="http://schemas.openxmlformats.org/officeDocument/2006/relationships">
+  <p:cSld>
+    <p:spTree>
+      <p:nvGrpSpPr>
+        <p:cNvPr id="1" name=""/>
+        <p:cNvGrpSpPr/>
+        <p:nvPr/>
+      </p:nvGrpSpPr>
+      <p:grpSpPr>
+        <a:xfrm>
+          <a:off x="0" y="0"/>
+          <a:ext cx="0" cy="0"/>
+          <a:chOff x="0" y="0"/>
+          <a:chExt cx="0" cy="0"/>
+        </a:xfrm>
+      </p:grpSpPr>
+      <p:sp>
+        <p:nvSpPr>
+          <p:cNvPr id="2" name="Slide Image Placeholder 1"/>
+          <p:cNvSpPr>
+            <a:spLocks noGrp="1"/>
+          </p:cNvSpPr>
+          <p:nvPr>
+            <p:ph type="sldImg" idx="2"/>
+          </p:nvPr>
+        </p:nvSpPr>
+        <p:spPr/>
+      </p:sp>
+      <p:sp>
+        <p:nvSpPr>
+          <p:cNvPr id="3" name="Notes Placeholder 2"/>
+          <p:cNvSpPr>
+            <a:spLocks noGrp="1"/>
+          </p:cNvSpPr>
+          <p:nvPr>
+            <p:ph type="body" idx="3" sz="quarter"/>
+          </p:nvPr>
+        </p:nvSpPr>
+        <p:spPr/>
+        <p:txBody>
+          <a:bodyPr/>
+          <a:lstStyle/>
+          <a:p>
+            <a:r>
+              <a:t>Reference slide: Agent types supported in the Agent 365 PoV. Note: Agent 365 is the governance capability set within Microsoft 365 — not a separately licensed product.</a:t>
+            </a:r>
+          </a:p>
+        </p:txBody>
+      </p:sp>
+      <p:sp>
+        <p:nvSpPr>
+          <p:cNvPr id="4" name="Slide Number Placeholder 3"/>
+          <p:cNvSpPr>
+            <a:spLocks noGrp="1"/>
+          </p:cNvSpPr>
+          <p:nvPr>
+            <p:ph type="sldNum" idx="5" sz="quarter"/>
+          </p:nvPr>
+        </p:nvSpPr>
+        <p:spPr/>
+      </p:sp>
+    </p:spTree>
+  </p:cSld>
+  <p:clrMapOvr>
+    <a:masterClrMapping/>
+  </p:clrMapOvr>
+</p:notes>
+</file>
+
+<file path=ppt/notesSlides/notesSlide38.xml><?xml version="1.0" encoding="utf-8"?>
 <p:notes xmlns:a="http://schemas.openxmlformats.org/drawingml/2006/main" xmlns:p="http://schemas.openxmlformats.org/presentationml/2006/main" xmlns:r="http://schemas.openxmlformats.org/officeDocument/2006/relationships">
   <p:cSld>
     <p:spTree>
@@ -14387,7 +14562,7 @@
     <p:bg>
       <p:bgPr>
         <a:solidFill>
-          <a:srgbClr val="002050"/>
+          <a:srgbClr val="FFFFFF"/>
         </a:solidFill>
         <a:effectLst/>
       </p:bgPr>
@@ -14407,8 +14582,8 @@
         </p:nvSpPr>
         <p:spPr>
           <a:xfrm>
-            <a:off x="0" y="0"/>
-            <a:ext cx="228600" cy="6858000"/>
+            <a:off x="457200" y="457200"/>
+            <a:ext cx="109220" cy="508000"/>
           </a:xfrm>
           <a:prstGeom prst="rect">
             <a:avLst/>
@@ -14444,14 +14619,157 @@
       </p:sp>
       <p:sp>
         <p:nvSpPr>
-          <p:cNvPr id="3" name="Rectangle 2"/>
+          <p:cNvPr id="3" name="TextBox 2"/>
+          <p:cNvSpPr txBox="1"/>
+          <p:nvPr/>
+        </p:nvSpPr>
+        <p:spPr>
+          <a:xfrm>
+            <a:off x="658368" y="365760"/>
+            <a:ext cx="10515600" cy="640080"/>
+          </a:xfrm>
+          <a:prstGeom prst="rect">
+            <a:avLst/>
+          </a:prstGeom>
+          <a:noFill/>
+        </p:spPr>
+        <p:txBody>
+          <a:bodyPr wrap="square" anchor="ctr">
+            <a:spAutoFit/>
+          </a:bodyPr>
+          <a:lstStyle/>
+          <a:p>
+            <a:pPr algn="l">
+              <a:defRPr sz="2600" b="0">
+                <a:solidFill>
+                  <a:srgbClr val="000000"/>
+                </a:solidFill>
+                <a:latin typeface="Segoe UI Semibold"/>
+              </a:defRPr>
+            </a:pPr>
+            <a:r>
+              <a:t>Advanced Hunting: AIAgentsInfo Table</a:t>
+            </a:r>
+          </a:p>
+        </p:txBody>
+      </p:sp>
+      <p:sp>
+        <p:nvSpPr>
+          <p:cNvPr id="4" name="TextBox 3"/>
+          <p:cNvSpPr txBox="1"/>
+          <p:nvPr/>
+        </p:nvSpPr>
+        <p:spPr>
+          <a:xfrm>
+            <a:off x="658368" y="1280160"/>
+            <a:ext cx="10515600" cy="4572000"/>
+          </a:xfrm>
+          <a:prstGeom prst="rect">
+            <a:avLst/>
+          </a:prstGeom>
+          <a:noFill/>
+        </p:spPr>
+        <p:txBody>
+          <a:bodyPr wrap="square">
+            <a:spAutoFit/>
+          </a:bodyPr>
+          <a:lstStyle/>
+          <a:p>
+            <a:pPr marL="228600" indent="-228600">
+              <a:spcBef>
+                <a:spcPts val="400"/>
+              </a:spcBef>
+              <a:spcAft>
+                <a:spcPts val="1000"/>
+              </a:spcAft>
+              <a:defRPr sz="1400">
+                <a:solidFill>
+                  <a:srgbClr val="000000"/>
+                </a:solidFill>
+                <a:latin typeface="Segoe UI Semibold"/>
+              </a:defRPr>
+              <a:buFont typeface="Arial"/>
+              <a:buChar char="•"/>
+            </a:pPr>
+            <a:r>
+              <a:t>Defender XDR advanced hunting includes the AIAgentsInfo table — populated via Agent 365 connectors</a:t>
+            </a:r>
+          </a:p>
+          <a:p>
+            <a:pPr marL="228600" indent="-228600">
+              <a:spcBef>
+                <a:spcPts val="400"/>
+              </a:spcBef>
+              <a:spcAft>
+                <a:spcPts val="1000"/>
+              </a:spcAft>
+              <a:defRPr sz="1400">
+                <a:solidFill>
+                  <a:srgbClr val="000000"/>
+                </a:solidFill>
+                <a:latin typeface="Segoe UI Semibold"/>
+              </a:defRPr>
+              <a:buFont typeface="Arial"/>
+              <a:buChar char="•"/>
+            </a:pPr>
+            <a:r>
+              <a:t>Filter with RegistrySource == "A365" for Agent 365 data</a:t>
+            </a:r>
+          </a:p>
+          <a:p>
+            <a:pPr marL="228600" indent="-228600">
+              <a:spcBef>
+                <a:spcPts val="400"/>
+              </a:spcBef>
+              <a:spcAft>
+                <a:spcPts val="1000"/>
+              </a:spcAft>
+              <a:defRPr sz="1400">
+                <a:solidFill>
+                  <a:srgbClr val="000000"/>
+                </a:solidFill>
+                <a:latin typeface="Segoe UI Semibold"/>
+              </a:defRPr>
+              <a:buFont typeface="Arial"/>
+              <a:buChar char="•"/>
+            </a:pPr>
+            <a:r>
+              <a:t>Key columns: AIAgentId, AIAgentName, AgentStatus, Instructions, AgentActionTriggers, IsBlocked</a:t>
+            </a:r>
+          </a:p>
+          <a:p>
+            <a:pPr marL="228600" indent="-228600">
+              <a:spcBef>
+                <a:spcPts val="400"/>
+              </a:spcBef>
+              <a:spcAft>
+                <a:spcPts val="1000"/>
+              </a:spcAft>
+              <a:defRPr sz="1400">
+                <a:solidFill>
+                  <a:srgbClr val="000000"/>
+                </a:solidFill>
+                <a:latin typeface="Segoe UI Semibold"/>
+              </a:defRPr>
+              <a:buFont typeface="Arial"/>
+              <a:buChar char="•"/>
+            </a:pPr>
+            <a:r>
+              <a:t>Enables proactive threat hunting directly from the SOC console</a:t>
+            </a:r>
+          </a:p>
+        </p:txBody>
+      </p:sp>
+      <p:sp>
+        <p:nvSpPr>
+          <p:cNvPr id="5" name="Rectangle 4"/>
           <p:cNvSpPr/>
           <p:nvPr/>
         </p:nvSpPr>
         <p:spPr>
           <a:xfrm>
-            <a:off x="10972800" y="274320"/>
-            <a:ext cx="165100" cy="165100"/>
+            <a:off x="365760" y="6400800"/>
+            <a:ext cx="63500" cy="63500"/>
           </a:xfrm>
           <a:prstGeom prst="rect">
             <a:avLst/>
@@ -14487,14 +14805,14 @@
       </p:sp>
       <p:sp>
         <p:nvSpPr>
-          <p:cNvPr id="4" name="Rectangle 3"/>
+          <p:cNvPr id="6" name="Rectangle 5"/>
           <p:cNvSpPr/>
           <p:nvPr/>
         </p:nvSpPr>
         <p:spPr>
           <a:xfrm>
-            <a:off x="11156950" y="274320"/>
-            <a:ext cx="165100" cy="165100"/>
+            <a:off x="448310" y="6400800"/>
+            <a:ext cx="63500" cy="63500"/>
           </a:xfrm>
           <a:prstGeom prst="rect">
             <a:avLst/>
@@ -14530,14 +14848,14 @@
       </p:sp>
       <p:sp>
         <p:nvSpPr>
-          <p:cNvPr id="5" name="Rectangle 4"/>
+          <p:cNvPr id="7" name="Rectangle 6"/>
           <p:cNvSpPr/>
           <p:nvPr/>
         </p:nvSpPr>
         <p:spPr>
           <a:xfrm>
-            <a:off x="10972800" y="458470"/>
-            <a:ext cx="165100" cy="165100"/>
+            <a:off x="365760" y="6483350"/>
+            <a:ext cx="63500" cy="63500"/>
           </a:xfrm>
           <a:prstGeom prst="rect">
             <a:avLst/>
@@ -14573,14 +14891,14 @@
       </p:sp>
       <p:sp>
         <p:nvSpPr>
-          <p:cNvPr id="6" name="Rectangle 5"/>
+          <p:cNvPr id="8" name="Rectangle 7"/>
           <p:cNvSpPr/>
           <p:nvPr/>
         </p:nvSpPr>
         <p:spPr>
           <a:xfrm>
-            <a:off x="11156950" y="458470"/>
-            <a:ext cx="165100" cy="165100"/>
+            <a:off x="448310" y="6483350"/>
+            <a:ext cx="63500" cy="63500"/>
           </a:xfrm>
           <a:prstGeom prst="rect">
             <a:avLst/>
@@ -14616,14 +14934,14 @@
       </p:sp>
       <p:sp>
         <p:nvSpPr>
-          <p:cNvPr id="7" name="TextBox 6"/>
+          <p:cNvPr id="9" name="TextBox 8"/>
           <p:cNvSpPr txBox="1"/>
           <p:nvPr/>
         </p:nvSpPr>
         <p:spPr>
           <a:xfrm>
-            <a:off x="731520" y="457200"/>
-            <a:ext cx="5486400" cy="5029200"/>
+            <a:off x="594360" y="6291072"/>
+            <a:ext cx="1371600" cy="274320"/>
           </a:xfrm>
           <a:prstGeom prst="rect">
             <a:avLst/>
@@ -14637,29 +14955,29 @@
           <a:lstStyle/>
           <a:p>
             <a:pPr algn="l">
-              <a:defRPr sz="38000" b="0">
-                <a:solidFill>
-                  <a:srgbClr val="003A70"/>
-                </a:solidFill>
-                <a:latin typeface="Segoe UI Light"/>
-              </a:defRPr>
-            </a:pPr>
-            <a:r>
-              <a:t>5</a:t>
-            </a:r>
-          </a:p>
-        </p:txBody>
-      </p:sp>
-      <p:sp>
-        <p:nvSpPr>
-          <p:cNvPr id="8" name="TextBox 7"/>
+              <a:defRPr sz="1100">
+                <a:solidFill>
+                  <a:srgbClr val="000000"/>
+                </a:solidFill>
+                <a:latin typeface="Segoe UI"/>
+              </a:defRPr>
+            </a:pPr>
+            <a:r>
+              <a:t>Microsoft</a:t>
+            </a:r>
+          </a:p>
+        </p:txBody>
+      </p:sp>
+      <p:sp>
+        <p:nvSpPr>
+          <p:cNvPr id="10" name="TextBox 9"/>
           <p:cNvSpPr txBox="1"/>
           <p:nvPr/>
         </p:nvSpPr>
         <p:spPr>
           <a:xfrm>
-            <a:off x="914400" y="3200400"/>
-            <a:ext cx="9144000" cy="1097280"/>
+            <a:off x="7772400" y="6291072"/>
+            <a:ext cx="4114800" cy="274320"/>
           </a:xfrm>
           <a:prstGeom prst="rect">
             <a:avLst/>
@@ -14667,37 +14985,21 @@
           <a:noFill/>
         </p:spPr>
         <p:txBody>
-          <a:bodyPr wrap="square" anchor="ctr">
+          <a:bodyPr wrap="none">
             <a:spAutoFit/>
           </a:bodyPr>
           <a:lstStyle/>
           <a:p>
-            <a:pPr algn="l">
-              <a:defRPr sz="5600" b="0">
-                <a:solidFill>
-                  <a:srgbClr val="FFFFFF"/>
-                </a:solidFill>
-                <a:latin typeface="Segoe UI Light"/>
-              </a:defRPr>
-            </a:pPr>
-            <a:r>
-              <a:t>Use Case 5</a:t>
-            </a:r>
-          </a:p>
-          <a:p>
-            <a:pPr algn="l">
-              <a:spcBef>
-                <a:spcPts val="800"/>
-              </a:spcBef>
-              <a:defRPr sz="2200">
-                <a:solidFill>
-                  <a:srgbClr val="50E6FF"/>
+            <a:pPr algn="r">
+              <a:defRPr sz="1000">
+                <a:solidFill>
+                  <a:srgbClr val="000000"/>
                 </a:solidFill>
                 <a:latin typeface="Segoe UI"/>
               </a:defRPr>
             </a:pPr>
             <a:r>
-              <a:t>Audit, Compliance, and Lifecycle</a:t>
+              <a:t>Agent 365  |  Proof of Value</a:t>
             </a:r>
           </a:p>
         </p:txBody>
@@ -14802,7 +15104,7 @@
               </a:defRPr>
             </a:pPr>
             <a:r>
-              <a:t>When Auditors Come Knocking, Can You Show the Agent Evidence Chain?</a:t>
+              <a:t>Hunting Queries: Agent Inventory and Security Risks</a:t>
             </a:r>
           </a:p>
         </p:txBody>
@@ -14846,7 +15148,7 @@
               <a:buChar char="•"/>
             </a:pPr>
             <a:r>
-              <a:t>Regulatory frameworks increasingly expect governance over autonomous AI systems</a:t>
+              <a:t>Query 1 — List All Agents: Full inventory with owner/creator UPNs from the SOC console</a:t>
             </a:r>
           </a:p>
           <a:p>
@@ -14867,7 +15169,7 @@
               <a:buChar char="•"/>
             </a:pPr>
             <a:r>
-              <a:t>Auditors need a complete trail: who deployed it, what it accessed, when it was deactivated</a:t>
+              <a:t>Query 2 — Agents Without Instructions: Published agents missing system prompts are vulnerable to prompt injection</a:t>
             </a:r>
           </a:p>
           <a:p>
@@ -14888,7 +15190,7 @@
               <a:buChar char="•"/>
             </a:pPr>
             <a:r>
-              <a:t>Agent 365 provides full lifecycle audit through M365 compliance fabric</a:t>
+              <a:t>Query 3 — MCP Tools Configured: Agents with remote MCP servers extend capabilities but increase attack surface</a:t>
             </a:r>
           </a:p>
           <a:p>
@@ -14909,7 +15211,7 @@
               <a:buChar char="•"/>
             </a:pPr>
             <a:r>
-              <a:t>Same evidence format auditors already accept for user activities</a:t>
+              <a:t>Query 4 — Non-HTTPS Endpoints: Agents communicating over unencrypted HTTP expose data in transit</a:t>
             </a:r>
           </a:p>
         </p:txBody>
@@ -15172,7 +15474,7 @@
     <p:bg>
       <p:bgPr>
         <a:solidFill>
-          <a:srgbClr val="FFFFFF"/>
+          <a:srgbClr val="002050"/>
         </a:solidFill>
         <a:effectLst/>
       </p:bgPr>
@@ -15192,8 +15494,8 @@
         </p:nvSpPr>
         <p:spPr>
           <a:xfrm>
-            <a:off x="457200" y="457200"/>
-            <a:ext cx="109220" cy="508000"/>
+            <a:off x="0" y="0"/>
+            <a:ext cx="228600" cy="6858000"/>
           </a:xfrm>
           <a:prstGeom prst="rect">
             <a:avLst/>
@@ -15229,178 +15531,14 @@
       </p:sp>
       <p:sp>
         <p:nvSpPr>
-          <p:cNvPr id="3" name="TextBox 2"/>
-          <p:cNvSpPr txBox="1"/>
-          <p:nvPr/>
-        </p:nvSpPr>
-        <p:spPr>
-          <a:xfrm>
-            <a:off x="658368" y="365760"/>
-            <a:ext cx="10515600" cy="640080"/>
-          </a:xfrm>
-          <a:prstGeom prst="rect">
-            <a:avLst/>
-          </a:prstGeom>
-          <a:noFill/>
-        </p:spPr>
-        <p:txBody>
-          <a:bodyPr wrap="square" anchor="ctr">
-            <a:spAutoFit/>
-          </a:bodyPr>
-          <a:lstStyle/>
-          <a:p>
-            <a:pPr algn="l">
-              <a:defRPr sz="2600" b="0">
-                <a:solidFill>
-                  <a:srgbClr val="000000"/>
-                </a:solidFill>
-                <a:latin typeface="Segoe UI Semibold"/>
-              </a:defRPr>
-            </a:pPr>
-            <a:r>
-              <a:t>Live Demo: Full Audit Trail and Lifecycle Management</a:t>
-            </a:r>
-          </a:p>
-        </p:txBody>
-      </p:sp>
-      <p:sp>
-        <p:nvSpPr>
-          <p:cNvPr id="4" name="TextBox 3"/>
-          <p:cNvSpPr txBox="1"/>
-          <p:nvPr/>
-        </p:nvSpPr>
-        <p:spPr>
-          <a:xfrm>
-            <a:off x="658368" y="1280160"/>
-            <a:ext cx="10515600" cy="4572000"/>
-          </a:xfrm>
-          <a:prstGeom prst="rect">
-            <a:avLst/>
-          </a:prstGeom>
-          <a:noFill/>
-        </p:spPr>
-        <p:txBody>
-          <a:bodyPr wrap="square">
-            <a:spAutoFit/>
-          </a:bodyPr>
-          <a:lstStyle/>
-          <a:p>
-            <a:pPr marL="228600" indent="-228600">
-              <a:spcBef>
-                <a:spcPts val="400"/>
-              </a:spcBef>
-              <a:spcAft>
-                <a:spcPts val="1000"/>
-              </a:spcAft>
-              <a:defRPr sz="1400">
-                <a:solidFill>
-                  <a:srgbClr val="000000"/>
-                </a:solidFill>
-                <a:latin typeface="Segoe UI Semibold"/>
-              </a:defRPr>
-              <a:buFont typeface="Arial"/>
-              <a:buChar char="•"/>
-            </a:pPr>
-            <a:r>
-              <a:t>Review complete audit trail for an agent (deployment through operation)</a:t>
-            </a:r>
-          </a:p>
-          <a:p>
-            <a:pPr marL="228600" indent="-228600">
-              <a:spcBef>
-                <a:spcPts val="400"/>
-              </a:spcBef>
-              <a:spcAft>
-                <a:spcPts val="1000"/>
-              </a:spcAft>
-              <a:defRPr sz="1400">
-                <a:solidFill>
-                  <a:srgbClr val="000000"/>
-                </a:solidFill>
-                <a:latin typeface="Segoe UI Semibold"/>
-              </a:defRPr>
-              <a:buFont typeface="Arial"/>
-              <a:buChar char="•"/>
-            </a:pPr>
-            <a:r>
-              <a:t>Execute lifecycle drill: block agent, deactivate agent, delete agent</a:t>
-            </a:r>
-          </a:p>
-          <a:p>
-            <a:pPr marL="228600" indent="-228600">
-              <a:spcBef>
-                <a:spcPts val="400"/>
-              </a:spcBef>
-              <a:spcAft>
-                <a:spcPts val="1000"/>
-              </a:spcAft>
-              <a:defRPr sz="1400">
-                <a:solidFill>
-                  <a:srgbClr val="000000"/>
-                </a:solidFill>
-                <a:latin typeface="Segoe UI Semibold"/>
-              </a:defRPr>
-              <a:buFont typeface="Arial"/>
-              <a:buChar char="•"/>
-            </a:pPr>
-            <a:r>
-              <a:t>Verify each lifecycle action generates audit entry with timestamp and actor</a:t>
-            </a:r>
-          </a:p>
-          <a:p>
-            <a:pPr marL="228600" indent="-228600">
-              <a:spcBef>
-                <a:spcPts val="400"/>
-              </a:spcBef>
-              <a:spcAft>
-                <a:spcPts val="1000"/>
-              </a:spcAft>
-              <a:defRPr sz="1400">
-                <a:solidFill>
-                  <a:srgbClr val="000000"/>
-                </a:solidFill>
-                <a:latin typeface="Segoe UI Semibold"/>
-              </a:defRPr>
-              <a:buFont typeface="Arial"/>
-              <a:buChar char="•"/>
-            </a:pPr>
-            <a:r>
-              <a:t>Show data retention policy applying to agent audit records</a:t>
-            </a:r>
-          </a:p>
-          <a:p>
-            <a:pPr marL="228600" indent="-228600">
-              <a:spcBef>
-                <a:spcPts val="400"/>
-              </a:spcBef>
-              <a:spcAft>
-                <a:spcPts val="1000"/>
-              </a:spcAft>
-              <a:defRPr sz="1400">
-                <a:solidFill>
-                  <a:srgbClr val="000000"/>
-                </a:solidFill>
-                <a:latin typeface="Segoe UI Semibold"/>
-              </a:defRPr>
-              <a:buFont typeface="Arial"/>
-              <a:buChar char="•"/>
-            </a:pPr>
-            <a:r>
-              <a:t>Demonstrate compliance report including agent activities</a:t>
-            </a:r>
-          </a:p>
-        </p:txBody>
-      </p:sp>
-      <p:sp>
-        <p:nvSpPr>
-          <p:cNvPr id="5" name="Rectangle 4"/>
+          <p:cNvPr id="3" name="Rectangle 2"/>
           <p:cNvSpPr/>
           <p:nvPr/>
         </p:nvSpPr>
         <p:spPr>
           <a:xfrm>
-            <a:off x="365760" y="6400800"/>
-            <a:ext cx="63500" cy="63500"/>
+            <a:off x="10972800" y="274320"/>
+            <a:ext cx="165100" cy="165100"/>
           </a:xfrm>
           <a:prstGeom prst="rect">
             <a:avLst/>
@@ -15436,14 +15574,14 @@
       </p:sp>
       <p:sp>
         <p:nvSpPr>
-          <p:cNvPr id="6" name="Rectangle 5"/>
+          <p:cNvPr id="4" name="Rectangle 3"/>
           <p:cNvSpPr/>
           <p:nvPr/>
         </p:nvSpPr>
         <p:spPr>
           <a:xfrm>
-            <a:off x="448310" y="6400800"/>
-            <a:ext cx="63500" cy="63500"/>
+            <a:off x="11156950" y="274320"/>
+            <a:ext cx="165100" cy="165100"/>
           </a:xfrm>
           <a:prstGeom prst="rect">
             <a:avLst/>
@@ -15479,14 +15617,14 @@
       </p:sp>
       <p:sp>
         <p:nvSpPr>
-          <p:cNvPr id="7" name="Rectangle 6"/>
+          <p:cNvPr id="5" name="Rectangle 4"/>
           <p:cNvSpPr/>
           <p:nvPr/>
         </p:nvSpPr>
         <p:spPr>
           <a:xfrm>
-            <a:off x="365760" y="6483350"/>
-            <a:ext cx="63500" cy="63500"/>
+            <a:off x="10972800" y="458470"/>
+            <a:ext cx="165100" cy="165100"/>
           </a:xfrm>
           <a:prstGeom prst="rect">
             <a:avLst/>
@@ -15522,14 +15660,14 @@
       </p:sp>
       <p:sp>
         <p:nvSpPr>
-          <p:cNvPr id="8" name="Rectangle 7"/>
+          <p:cNvPr id="6" name="Rectangle 5"/>
           <p:cNvSpPr/>
           <p:nvPr/>
         </p:nvSpPr>
         <p:spPr>
           <a:xfrm>
-            <a:off x="448310" y="6483350"/>
-            <a:ext cx="63500" cy="63500"/>
+            <a:off x="11156950" y="458470"/>
+            <a:ext cx="165100" cy="165100"/>
           </a:xfrm>
           <a:prstGeom prst="rect">
             <a:avLst/>
@@ -15565,14 +15703,14 @@
       </p:sp>
       <p:sp>
         <p:nvSpPr>
-          <p:cNvPr id="9" name="TextBox 8"/>
+          <p:cNvPr id="7" name="TextBox 6"/>
           <p:cNvSpPr txBox="1"/>
           <p:nvPr/>
         </p:nvSpPr>
         <p:spPr>
           <a:xfrm>
-            <a:off x="594360" y="6291072"/>
-            <a:ext cx="1371600" cy="274320"/>
+            <a:off x="731520" y="457200"/>
+            <a:ext cx="5486400" cy="5029200"/>
           </a:xfrm>
           <a:prstGeom prst="rect">
             <a:avLst/>
@@ -15586,29 +15724,29 @@
           <a:lstStyle/>
           <a:p>
             <a:pPr algn="l">
-              <a:defRPr sz="1100">
-                <a:solidFill>
-                  <a:srgbClr val="000000"/>
-                </a:solidFill>
-                <a:latin typeface="Segoe UI"/>
-              </a:defRPr>
-            </a:pPr>
-            <a:r>
-              <a:t>Microsoft</a:t>
-            </a:r>
-          </a:p>
-        </p:txBody>
-      </p:sp>
-      <p:sp>
-        <p:nvSpPr>
-          <p:cNvPr id="10" name="TextBox 9"/>
+              <a:defRPr sz="38000" b="0">
+                <a:solidFill>
+                  <a:srgbClr val="003A70"/>
+                </a:solidFill>
+                <a:latin typeface="Segoe UI Light"/>
+              </a:defRPr>
+            </a:pPr>
+            <a:r>
+              <a:t>5</a:t>
+            </a:r>
+          </a:p>
+        </p:txBody>
+      </p:sp>
+      <p:sp>
+        <p:nvSpPr>
+          <p:cNvPr id="8" name="TextBox 7"/>
           <p:cNvSpPr txBox="1"/>
           <p:nvPr/>
         </p:nvSpPr>
         <p:spPr>
           <a:xfrm>
-            <a:off x="7772400" y="6291072"/>
-            <a:ext cx="4114800" cy="274320"/>
+            <a:off x="914400" y="3200400"/>
+            <a:ext cx="9144000" cy="1097280"/>
           </a:xfrm>
           <a:prstGeom prst="rect">
             <a:avLst/>
@@ -15616,21 +15754,37 @@
           <a:noFill/>
         </p:spPr>
         <p:txBody>
-          <a:bodyPr wrap="none">
+          <a:bodyPr wrap="square" anchor="ctr">
             <a:spAutoFit/>
           </a:bodyPr>
           <a:lstStyle/>
           <a:p>
-            <a:pPr algn="r">
-              <a:defRPr sz="1000">
-                <a:solidFill>
-                  <a:srgbClr val="000000"/>
+            <a:pPr algn="l">
+              <a:defRPr sz="5600" b="0">
+                <a:solidFill>
+                  <a:srgbClr val="FFFFFF"/>
+                </a:solidFill>
+                <a:latin typeface="Segoe UI Light"/>
+              </a:defRPr>
+            </a:pPr>
+            <a:r>
+              <a:t>Use Case 5</a:t>
+            </a:r>
+          </a:p>
+          <a:p>
+            <a:pPr algn="l">
+              <a:spcBef>
+                <a:spcPts val="800"/>
+              </a:spcBef>
+              <a:defRPr sz="2200">
+                <a:solidFill>
+                  <a:srgbClr val="50E6FF"/>
                 </a:solidFill>
                 <a:latin typeface="Segoe UI"/>
               </a:defRPr>
             </a:pPr>
             <a:r>
-              <a:t>Agent 365  |  Proof of Value</a:t>
+              <a:t>Audit, Compliance, and Lifecycle</a:t>
             </a:r>
           </a:p>
         </p:txBody>
@@ -15735,7 +15889,7 @@
               </a:defRPr>
             </a:pPr>
             <a:r>
-              <a:t>How We Measure Success for Audit and Compliance</a:t>
+              <a:t>When Auditors Come Knocking, Can You Show the Agent Evidence Chain?</a:t>
             </a:r>
           </a:p>
         </p:txBody>
@@ -15779,7 +15933,7 @@
               <a:buChar char="•"/>
             </a:pPr>
             <a:r>
-              <a:t>Complete audit trail exists from agent deployment through deletion</a:t>
+              <a:t>Regulatory frameworks increasingly expect governance over autonomous AI systems</a:t>
             </a:r>
           </a:p>
           <a:p>
@@ -15800,7 +15954,7 @@
               <a:buChar char="•"/>
             </a:pPr>
             <a:r>
-              <a:t>Each lifecycle state change generates a timestamped audit entry</a:t>
+              <a:t>Auditors need a complete trail: who deployed it, what it accessed, when it was deactivated</a:t>
             </a:r>
           </a:p>
           <a:p>
@@ -15821,7 +15975,7 @@
               <a:buChar char="•"/>
             </a:pPr>
             <a:r>
-              <a:t>Data retention policies correctly apply to agent audit records</a:t>
+              <a:t>Agent 365 provides full lifecycle audit through M365 compliance fabric</a:t>
             </a:r>
           </a:p>
           <a:p>
@@ -15842,28 +15996,7 @@
               <a:buChar char="•"/>
             </a:pPr>
             <a:r>
-              <a:t>Compliance report export includes agent activities in accepted format</a:t>
-            </a:r>
-          </a:p>
-          <a:p>
-            <a:pPr marL="228600" indent="-228600">
-              <a:spcBef>
-                <a:spcPts val="400"/>
-              </a:spcBef>
-              <a:spcAft>
-                <a:spcPts val="1000"/>
-              </a:spcAft>
-              <a:defRPr sz="1400">
-                <a:solidFill>
-                  <a:srgbClr val="000000"/>
-                </a:solidFill>
-                <a:latin typeface="Segoe UI Semibold"/>
-              </a:defRPr>
-              <a:buFont typeface="Arial"/>
-              <a:buChar char="•"/>
-            </a:pPr>
-            <a:r>
-              <a:t>No gaps in evidence chain — auditor can reconstruct full agent history</a:t>
+              <a:t>Same evidence format auditors already accept for user activities</a:t>
             </a:r>
           </a:p>
         </p:txBody>
@@ -16689,7 +16822,7 @@
               </a:defRPr>
             </a:pPr>
             <a:r>
-              <a:t>Why This Matters: No Parallel Evidence Chain</a:t>
+              <a:t>Live Demo: Full Audit Trail and Lifecycle Management</a:t>
             </a:r>
           </a:p>
         </p:txBody>
@@ -16733,7 +16866,7 @@
               <a:buChar char="•"/>
             </a:pPr>
             <a:r>
-              <a:t>Agent audit data feeds the same M365 compliance fabric used for users</a:t>
+              <a:t>Review complete audit trail for an agent (deployment through operation)</a:t>
             </a:r>
           </a:p>
           <a:p>
@@ -16754,7 +16887,7 @@
               <a:buChar char="•"/>
             </a:pPr>
             <a:r>
-              <a:t>Auditors already accept this format — no new validation required</a:t>
+              <a:t>Execute lifecycle drill: block agent, deactivate agent, delete agent</a:t>
             </a:r>
           </a:p>
           <a:p>
@@ -16775,7 +16908,7 @@
               <a:buChar char="•"/>
             </a:pPr>
             <a:r>
-              <a:t>Data retention, legal hold, and eDiscovery apply uniformly</a:t>
+              <a:t>Verify each lifecycle action generates audit entry with timestamp and actor</a:t>
             </a:r>
           </a:p>
           <a:p>
@@ -16796,7 +16929,7 @@
               <a:buChar char="•"/>
             </a:pPr>
             <a:r>
-              <a:t>No separate compliance tool generating evidence that auditors must learn to trust</a:t>
+              <a:t>Show data retention policy applying to agent audit records</a:t>
             </a:r>
           </a:p>
           <a:p>
@@ -16817,7 +16950,7 @@
               <a:buChar char="•"/>
             </a:pPr>
             <a:r>
-              <a:t>Competing solutions create a second evidence chain requiring separate attestation</a:t>
+              <a:t>Demonstrate compliance report including agent activities</a:t>
             </a:r>
           </a:p>
         </p:txBody>
@@ -17075,6 +17208,960 @@
 </file>
 
 <file path=ppt/slides/slide31.xml><?xml version="1.0" encoding="utf-8"?>
+<p:sld xmlns:a="http://schemas.openxmlformats.org/drawingml/2006/main" xmlns:p="http://schemas.openxmlformats.org/presentationml/2006/main" xmlns:r="http://schemas.openxmlformats.org/officeDocument/2006/relationships">
+  <p:cSld>
+    <p:bg>
+      <p:bgPr>
+        <a:solidFill>
+          <a:srgbClr val="FFFFFF"/>
+        </a:solidFill>
+        <a:effectLst/>
+      </p:bgPr>
+    </p:bg>
+    <p:spTree>
+      <p:nvGrpSpPr>
+        <p:cNvPr id="1" name=""/>
+        <p:cNvGrpSpPr/>
+        <p:nvPr/>
+      </p:nvGrpSpPr>
+      <p:grpSpPr/>
+      <p:sp>
+        <p:nvSpPr>
+          <p:cNvPr id="2" name="Rectangle 1"/>
+          <p:cNvSpPr/>
+          <p:nvPr/>
+        </p:nvSpPr>
+        <p:spPr>
+          <a:xfrm>
+            <a:off x="457200" y="457200"/>
+            <a:ext cx="109220" cy="508000"/>
+          </a:xfrm>
+          <a:prstGeom prst="rect">
+            <a:avLst/>
+          </a:prstGeom>
+          <a:solidFill>
+            <a:srgbClr val="0078D4"/>
+          </a:solidFill>
+          <a:ln>
+            <a:noFill/>
+          </a:ln>
+        </p:spPr>
+        <p:style>
+          <a:lnRef idx="1">
+            <a:schemeClr val="accent1"/>
+          </a:lnRef>
+          <a:fillRef idx="3">
+            <a:schemeClr val="accent1"/>
+          </a:fillRef>
+          <a:effectRef idx="2">
+            <a:schemeClr val="accent1"/>
+          </a:effectRef>
+          <a:fontRef idx="minor">
+            <a:schemeClr val="lt1"/>
+          </a:fontRef>
+        </p:style>
+        <p:txBody>
+          <a:bodyPr rtlCol="0" anchor="ctr"/>
+          <a:lstStyle/>
+          <a:p>
+            <a:pPr algn="ctr"/>
+          </a:p>
+        </p:txBody>
+      </p:sp>
+      <p:sp>
+        <p:nvSpPr>
+          <p:cNvPr id="3" name="TextBox 2"/>
+          <p:cNvSpPr txBox="1"/>
+          <p:nvPr/>
+        </p:nvSpPr>
+        <p:spPr>
+          <a:xfrm>
+            <a:off x="658368" y="365760"/>
+            <a:ext cx="10515600" cy="640080"/>
+          </a:xfrm>
+          <a:prstGeom prst="rect">
+            <a:avLst/>
+          </a:prstGeom>
+          <a:noFill/>
+        </p:spPr>
+        <p:txBody>
+          <a:bodyPr wrap="square" anchor="ctr">
+            <a:spAutoFit/>
+          </a:bodyPr>
+          <a:lstStyle/>
+          <a:p>
+            <a:pPr algn="l">
+              <a:defRPr sz="2600" b="0">
+                <a:solidFill>
+                  <a:srgbClr val="000000"/>
+                </a:solidFill>
+                <a:latin typeface="Segoe UI Semibold"/>
+              </a:defRPr>
+            </a:pPr>
+            <a:r>
+              <a:t>How We Measure Success for Audit and Compliance</a:t>
+            </a:r>
+          </a:p>
+        </p:txBody>
+      </p:sp>
+      <p:sp>
+        <p:nvSpPr>
+          <p:cNvPr id="4" name="TextBox 3"/>
+          <p:cNvSpPr txBox="1"/>
+          <p:nvPr/>
+        </p:nvSpPr>
+        <p:spPr>
+          <a:xfrm>
+            <a:off x="658368" y="1280160"/>
+            <a:ext cx="10515600" cy="4572000"/>
+          </a:xfrm>
+          <a:prstGeom prst="rect">
+            <a:avLst/>
+          </a:prstGeom>
+          <a:noFill/>
+        </p:spPr>
+        <p:txBody>
+          <a:bodyPr wrap="square">
+            <a:spAutoFit/>
+          </a:bodyPr>
+          <a:lstStyle/>
+          <a:p>
+            <a:pPr marL="228600" indent="-228600">
+              <a:spcBef>
+                <a:spcPts val="400"/>
+              </a:spcBef>
+              <a:spcAft>
+                <a:spcPts val="1000"/>
+              </a:spcAft>
+              <a:defRPr sz="1400">
+                <a:solidFill>
+                  <a:srgbClr val="000000"/>
+                </a:solidFill>
+                <a:latin typeface="Segoe UI Semibold"/>
+              </a:defRPr>
+              <a:buFont typeface="Arial"/>
+              <a:buChar char="•"/>
+            </a:pPr>
+            <a:r>
+              <a:t>Complete audit trail exists from agent deployment through deletion</a:t>
+            </a:r>
+          </a:p>
+          <a:p>
+            <a:pPr marL="228600" indent="-228600">
+              <a:spcBef>
+                <a:spcPts val="400"/>
+              </a:spcBef>
+              <a:spcAft>
+                <a:spcPts val="1000"/>
+              </a:spcAft>
+              <a:defRPr sz="1400">
+                <a:solidFill>
+                  <a:srgbClr val="000000"/>
+                </a:solidFill>
+                <a:latin typeface="Segoe UI Semibold"/>
+              </a:defRPr>
+              <a:buFont typeface="Arial"/>
+              <a:buChar char="•"/>
+            </a:pPr>
+            <a:r>
+              <a:t>Each lifecycle state change generates a timestamped audit entry</a:t>
+            </a:r>
+          </a:p>
+          <a:p>
+            <a:pPr marL="228600" indent="-228600">
+              <a:spcBef>
+                <a:spcPts val="400"/>
+              </a:spcBef>
+              <a:spcAft>
+                <a:spcPts val="1000"/>
+              </a:spcAft>
+              <a:defRPr sz="1400">
+                <a:solidFill>
+                  <a:srgbClr val="000000"/>
+                </a:solidFill>
+                <a:latin typeface="Segoe UI Semibold"/>
+              </a:defRPr>
+              <a:buFont typeface="Arial"/>
+              <a:buChar char="•"/>
+            </a:pPr>
+            <a:r>
+              <a:t>Data retention policies correctly apply to agent audit records</a:t>
+            </a:r>
+          </a:p>
+          <a:p>
+            <a:pPr marL="228600" indent="-228600">
+              <a:spcBef>
+                <a:spcPts val="400"/>
+              </a:spcBef>
+              <a:spcAft>
+                <a:spcPts val="1000"/>
+              </a:spcAft>
+              <a:defRPr sz="1400">
+                <a:solidFill>
+                  <a:srgbClr val="000000"/>
+                </a:solidFill>
+                <a:latin typeface="Segoe UI Semibold"/>
+              </a:defRPr>
+              <a:buFont typeface="Arial"/>
+              <a:buChar char="•"/>
+            </a:pPr>
+            <a:r>
+              <a:t>Compliance report export includes agent activities in accepted format</a:t>
+            </a:r>
+          </a:p>
+          <a:p>
+            <a:pPr marL="228600" indent="-228600">
+              <a:spcBef>
+                <a:spcPts val="400"/>
+              </a:spcBef>
+              <a:spcAft>
+                <a:spcPts val="1000"/>
+              </a:spcAft>
+              <a:defRPr sz="1400">
+                <a:solidFill>
+                  <a:srgbClr val="000000"/>
+                </a:solidFill>
+                <a:latin typeface="Segoe UI Semibold"/>
+              </a:defRPr>
+              <a:buFont typeface="Arial"/>
+              <a:buChar char="•"/>
+            </a:pPr>
+            <a:r>
+              <a:t>No gaps in evidence chain — auditor can reconstruct full agent history</a:t>
+            </a:r>
+          </a:p>
+        </p:txBody>
+      </p:sp>
+      <p:sp>
+        <p:nvSpPr>
+          <p:cNvPr id="5" name="Rectangle 4"/>
+          <p:cNvSpPr/>
+          <p:nvPr/>
+        </p:nvSpPr>
+        <p:spPr>
+          <a:xfrm>
+            <a:off x="365760" y="6400800"/>
+            <a:ext cx="63500" cy="63500"/>
+          </a:xfrm>
+          <a:prstGeom prst="rect">
+            <a:avLst/>
+          </a:prstGeom>
+          <a:solidFill>
+            <a:srgbClr val="F25022"/>
+          </a:solidFill>
+          <a:ln>
+            <a:noFill/>
+          </a:ln>
+        </p:spPr>
+        <p:style>
+          <a:lnRef idx="1">
+            <a:schemeClr val="accent1"/>
+          </a:lnRef>
+          <a:fillRef idx="3">
+            <a:schemeClr val="accent1"/>
+          </a:fillRef>
+          <a:effectRef idx="2">
+            <a:schemeClr val="accent1"/>
+          </a:effectRef>
+          <a:fontRef idx="minor">
+            <a:schemeClr val="lt1"/>
+          </a:fontRef>
+        </p:style>
+        <p:txBody>
+          <a:bodyPr rtlCol="0" anchor="ctr"/>
+          <a:lstStyle/>
+          <a:p>
+            <a:pPr algn="ctr"/>
+          </a:p>
+        </p:txBody>
+      </p:sp>
+      <p:sp>
+        <p:nvSpPr>
+          <p:cNvPr id="6" name="Rectangle 5"/>
+          <p:cNvSpPr/>
+          <p:nvPr/>
+        </p:nvSpPr>
+        <p:spPr>
+          <a:xfrm>
+            <a:off x="448310" y="6400800"/>
+            <a:ext cx="63500" cy="63500"/>
+          </a:xfrm>
+          <a:prstGeom prst="rect">
+            <a:avLst/>
+          </a:prstGeom>
+          <a:solidFill>
+            <a:srgbClr val="7FBA00"/>
+          </a:solidFill>
+          <a:ln>
+            <a:noFill/>
+          </a:ln>
+        </p:spPr>
+        <p:style>
+          <a:lnRef idx="1">
+            <a:schemeClr val="accent1"/>
+          </a:lnRef>
+          <a:fillRef idx="3">
+            <a:schemeClr val="accent1"/>
+          </a:fillRef>
+          <a:effectRef idx="2">
+            <a:schemeClr val="accent1"/>
+          </a:effectRef>
+          <a:fontRef idx="minor">
+            <a:schemeClr val="lt1"/>
+          </a:fontRef>
+        </p:style>
+        <p:txBody>
+          <a:bodyPr rtlCol="0" anchor="ctr"/>
+          <a:lstStyle/>
+          <a:p>
+            <a:pPr algn="ctr"/>
+          </a:p>
+        </p:txBody>
+      </p:sp>
+      <p:sp>
+        <p:nvSpPr>
+          <p:cNvPr id="7" name="Rectangle 6"/>
+          <p:cNvSpPr/>
+          <p:nvPr/>
+        </p:nvSpPr>
+        <p:spPr>
+          <a:xfrm>
+            <a:off x="365760" y="6483350"/>
+            <a:ext cx="63500" cy="63500"/>
+          </a:xfrm>
+          <a:prstGeom prst="rect">
+            <a:avLst/>
+          </a:prstGeom>
+          <a:solidFill>
+            <a:srgbClr val="00A4EF"/>
+          </a:solidFill>
+          <a:ln>
+            <a:noFill/>
+          </a:ln>
+        </p:spPr>
+        <p:style>
+          <a:lnRef idx="1">
+            <a:schemeClr val="accent1"/>
+          </a:lnRef>
+          <a:fillRef idx="3">
+            <a:schemeClr val="accent1"/>
+          </a:fillRef>
+          <a:effectRef idx="2">
+            <a:schemeClr val="accent1"/>
+          </a:effectRef>
+          <a:fontRef idx="minor">
+            <a:schemeClr val="lt1"/>
+          </a:fontRef>
+        </p:style>
+        <p:txBody>
+          <a:bodyPr rtlCol="0" anchor="ctr"/>
+          <a:lstStyle/>
+          <a:p>
+            <a:pPr algn="ctr"/>
+          </a:p>
+        </p:txBody>
+      </p:sp>
+      <p:sp>
+        <p:nvSpPr>
+          <p:cNvPr id="8" name="Rectangle 7"/>
+          <p:cNvSpPr/>
+          <p:nvPr/>
+        </p:nvSpPr>
+        <p:spPr>
+          <a:xfrm>
+            <a:off x="448310" y="6483350"/>
+            <a:ext cx="63500" cy="63500"/>
+          </a:xfrm>
+          <a:prstGeom prst="rect">
+            <a:avLst/>
+          </a:prstGeom>
+          <a:solidFill>
+            <a:srgbClr val="FFB900"/>
+          </a:solidFill>
+          <a:ln>
+            <a:noFill/>
+          </a:ln>
+        </p:spPr>
+        <p:style>
+          <a:lnRef idx="1">
+            <a:schemeClr val="accent1"/>
+          </a:lnRef>
+          <a:fillRef idx="3">
+            <a:schemeClr val="accent1"/>
+          </a:fillRef>
+          <a:effectRef idx="2">
+            <a:schemeClr val="accent1"/>
+          </a:effectRef>
+          <a:fontRef idx="minor">
+            <a:schemeClr val="lt1"/>
+          </a:fontRef>
+        </p:style>
+        <p:txBody>
+          <a:bodyPr rtlCol="0" anchor="ctr"/>
+          <a:lstStyle/>
+          <a:p>
+            <a:pPr algn="ctr"/>
+          </a:p>
+        </p:txBody>
+      </p:sp>
+      <p:sp>
+        <p:nvSpPr>
+          <p:cNvPr id="9" name="TextBox 8"/>
+          <p:cNvSpPr txBox="1"/>
+          <p:nvPr/>
+        </p:nvSpPr>
+        <p:spPr>
+          <a:xfrm>
+            <a:off x="594360" y="6291072"/>
+            <a:ext cx="1371600" cy="274320"/>
+          </a:xfrm>
+          <a:prstGeom prst="rect">
+            <a:avLst/>
+          </a:prstGeom>
+          <a:noFill/>
+        </p:spPr>
+        <p:txBody>
+          <a:bodyPr wrap="none">
+            <a:spAutoFit/>
+          </a:bodyPr>
+          <a:lstStyle/>
+          <a:p>
+            <a:pPr algn="l">
+              <a:defRPr sz="1100">
+                <a:solidFill>
+                  <a:srgbClr val="000000"/>
+                </a:solidFill>
+                <a:latin typeface="Segoe UI"/>
+              </a:defRPr>
+            </a:pPr>
+            <a:r>
+              <a:t>Microsoft</a:t>
+            </a:r>
+          </a:p>
+        </p:txBody>
+      </p:sp>
+      <p:sp>
+        <p:nvSpPr>
+          <p:cNvPr id="10" name="TextBox 9"/>
+          <p:cNvSpPr txBox="1"/>
+          <p:nvPr/>
+        </p:nvSpPr>
+        <p:spPr>
+          <a:xfrm>
+            <a:off x="7772400" y="6291072"/>
+            <a:ext cx="4114800" cy="274320"/>
+          </a:xfrm>
+          <a:prstGeom prst="rect">
+            <a:avLst/>
+          </a:prstGeom>
+          <a:noFill/>
+        </p:spPr>
+        <p:txBody>
+          <a:bodyPr wrap="none">
+            <a:spAutoFit/>
+          </a:bodyPr>
+          <a:lstStyle/>
+          <a:p>
+            <a:pPr algn="r">
+              <a:defRPr sz="1000">
+                <a:solidFill>
+                  <a:srgbClr val="000000"/>
+                </a:solidFill>
+                <a:latin typeface="Segoe UI"/>
+              </a:defRPr>
+            </a:pPr>
+            <a:r>
+              <a:t>Agent 365  |  Proof of Value</a:t>
+            </a:r>
+          </a:p>
+        </p:txBody>
+      </p:sp>
+    </p:spTree>
+  </p:cSld>
+  <p:clrMapOvr>
+    <a:masterClrMapping/>
+  </p:clrMapOvr>
+</p:sld>
+</file>
+
+<file path=ppt/slides/slide32.xml><?xml version="1.0" encoding="utf-8"?>
+<p:sld xmlns:a="http://schemas.openxmlformats.org/drawingml/2006/main" xmlns:p="http://schemas.openxmlformats.org/presentationml/2006/main" xmlns:r="http://schemas.openxmlformats.org/officeDocument/2006/relationships">
+  <p:cSld>
+    <p:bg>
+      <p:bgPr>
+        <a:solidFill>
+          <a:srgbClr val="FFFFFF"/>
+        </a:solidFill>
+        <a:effectLst/>
+      </p:bgPr>
+    </p:bg>
+    <p:spTree>
+      <p:nvGrpSpPr>
+        <p:cNvPr id="1" name=""/>
+        <p:cNvGrpSpPr/>
+        <p:nvPr/>
+      </p:nvGrpSpPr>
+      <p:grpSpPr/>
+      <p:sp>
+        <p:nvSpPr>
+          <p:cNvPr id="2" name="Rectangle 1"/>
+          <p:cNvSpPr/>
+          <p:nvPr/>
+        </p:nvSpPr>
+        <p:spPr>
+          <a:xfrm>
+            <a:off x="457200" y="457200"/>
+            <a:ext cx="109220" cy="508000"/>
+          </a:xfrm>
+          <a:prstGeom prst="rect">
+            <a:avLst/>
+          </a:prstGeom>
+          <a:solidFill>
+            <a:srgbClr val="0078D4"/>
+          </a:solidFill>
+          <a:ln>
+            <a:noFill/>
+          </a:ln>
+        </p:spPr>
+        <p:style>
+          <a:lnRef idx="1">
+            <a:schemeClr val="accent1"/>
+          </a:lnRef>
+          <a:fillRef idx="3">
+            <a:schemeClr val="accent1"/>
+          </a:fillRef>
+          <a:effectRef idx="2">
+            <a:schemeClr val="accent1"/>
+          </a:effectRef>
+          <a:fontRef idx="minor">
+            <a:schemeClr val="lt1"/>
+          </a:fontRef>
+        </p:style>
+        <p:txBody>
+          <a:bodyPr rtlCol="0" anchor="ctr"/>
+          <a:lstStyle/>
+          <a:p>
+            <a:pPr algn="ctr"/>
+          </a:p>
+        </p:txBody>
+      </p:sp>
+      <p:sp>
+        <p:nvSpPr>
+          <p:cNvPr id="3" name="TextBox 2"/>
+          <p:cNvSpPr txBox="1"/>
+          <p:nvPr/>
+        </p:nvSpPr>
+        <p:spPr>
+          <a:xfrm>
+            <a:off x="658368" y="365760"/>
+            <a:ext cx="10515600" cy="640080"/>
+          </a:xfrm>
+          <a:prstGeom prst="rect">
+            <a:avLst/>
+          </a:prstGeom>
+          <a:noFill/>
+        </p:spPr>
+        <p:txBody>
+          <a:bodyPr wrap="square" anchor="ctr">
+            <a:spAutoFit/>
+          </a:bodyPr>
+          <a:lstStyle/>
+          <a:p>
+            <a:pPr algn="l">
+              <a:defRPr sz="2600" b="0">
+                <a:solidFill>
+                  <a:srgbClr val="000000"/>
+                </a:solidFill>
+                <a:latin typeface="Segoe UI Semibold"/>
+              </a:defRPr>
+            </a:pPr>
+            <a:r>
+              <a:t>Why This Matters: No Parallel Evidence Chain</a:t>
+            </a:r>
+          </a:p>
+        </p:txBody>
+      </p:sp>
+      <p:sp>
+        <p:nvSpPr>
+          <p:cNvPr id="4" name="TextBox 3"/>
+          <p:cNvSpPr txBox="1"/>
+          <p:nvPr/>
+        </p:nvSpPr>
+        <p:spPr>
+          <a:xfrm>
+            <a:off x="658368" y="1280160"/>
+            <a:ext cx="10515600" cy="4572000"/>
+          </a:xfrm>
+          <a:prstGeom prst="rect">
+            <a:avLst/>
+          </a:prstGeom>
+          <a:noFill/>
+        </p:spPr>
+        <p:txBody>
+          <a:bodyPr wrap="square">
+            <a:spAutoFit/>
+          </a:bodyPr>
+          <a:lstStyle/>
+          <a:p>
+            <a:pPr marL="228600" indent="-228600">
+              <a:spcBef>
+                <a:spcPts val="400"/>
+              </a:spcBef>
+              <a:spcAft>
+                <a:spcPts val="1000"/>
+              </a:spcAft>
+              <a:defRPr sz="1400">
+                <a:solidFill>
+                  <a:srgbClr val="000000"/>
+                </a:solidFill>
+                <a:latin typeface="Segoe UI Semibold"/>
+              </a:defRPr>
+              <a:buFont typeface="Arial"/>
+              <a:buChar char="•"/>
+            </a:pPr>
+            <a:r>
+              <a:t>Agent audit data feeds the same M365 compliance fabric used for users</a:t>
+            </a:r>
+          </a:p>
+          <a:p>
+            <a:pPr marL="228600" indent="-228600">
+              <a:spcBef>
+                <a:spcPts val="400"/>
+              </a:spcBef>
+              <a:spcAft>
+                <a:spcPts val="1000"/>
+              </a:spcAft>
+              <a:defRPr sz="1400">
+                <a:solidFill>
+                  <a:srgbClr val="000000"/>
+                </a:solidFill>
+                <a:latin typeface="Segoe UI Semibold"/>
+              </a:defRPr>
+              <a:buFont typeface="Arial"/>
+              <a:buChar char="•"/>
+            </a:pPr>
+            <a:r>
+              <a:t>Auditors already accept this format — no new validation required</a:t>
+            </a:r>
+          </a:p>
+          <a:p>
+            <a:pPr marL="228600" indent="-228600">
+              <a:spcBef>
+                <a:spcPts val="400"/>
+              </a:spcBef>
+              <a:spcAft>
+                <a:spcPts val="1000"/>
+              </a:spcAft>
+              <a:defRPr sz="1400">
+                <a:solidFill>
+                  <a:srgbClr val="000000"/>
+                </a:solidFill>
+                <a:latin typeface="Segoe UI Semibold"/>
+              </a:defRPr>
+              <a:buFont typeface="Arial"/>
+              <a:buChar char="•"/>
+            </a:pPr>
+            <a:r>
+              <a:t>Data retention, legal hold, and eDiscovery apply uniformly</a:t>
+            </a:r>
+          </a:p>
+          <a:p>
+            <a:pPr marL="228600" indent="-228600">
+              <a:spcBef>
+                <a:spcPts val="400"/>
+              </a:spcBef>
+              <a:spcAft>
+                <a:spcPts val="1000"/>
+              </a:spcAft>
+              <a:defRPr sz="1400">
+                <a:solidFill>
+                  <a:srgbClr val="000000"/>
+                </a:solidFill>
+                <a:latin typeface="Segoe UI Semibold"/>
+              </a:defRPr>
+              <a:buFont typeface="Arial"/>
+              <a:buChar char="•"/>
+            </a:pPr>
+            <a:r>
+              <a:t>No separate compliance tool generating evidence that auditors must learn to trust</a:t>
+            </a:r>
+          </a:p>
+          <a:p>
+            <a:pPr marL="228600" indent="-228600">
+              <a:spcBef>
+                <a:spcPts val="400"/>
+              </a:spcBef>
+              <a:spcAft>
+                <a:spcPts val="1000"/>
+              </a:spcAft>
+              <a:defRPr sz="1400">
+                <a:solidFill>
+                  <a:srgbClr val="000000"/>
+                </a:solidFill>
+                <a:latin typeface="Segoe UI Semibold"/>
+              </a:defRPr>
+              <a:buFont typeface="Arial"/>
+              <a:buChar char="•"/>
+            </a:pPr>
+            <a:r>
+              <a:t>Competing solutions create a second evidence chain requiring separate attestation</a:t>
+            </a:r>
+          </a:p>
+        </p:txBody>
+      </p:sp>
+      <p:sp>
+        <p:nvSpPr>
+          <p:cNvPr id="5" name="Rectangle 4"/>
+          <p:cNvSpPr/>
+          <p:nvPr/>
+        </p:nvSpPr>
+        <p:spPr>
+          <a:xfrm>
+            <a:off x="365760" y="6400800"/>
+            <a:ext cx="63500" cy="63500"/>
+          </a:xfrm>
+          <a:prstGeom prst="rect">
+            <a:avLst/>
+          </a:prstGeom>
+          <a:solidFill>
+            <a:srgbClr val="F25022"/>
+          </a:solidFill>
+          <a:ln>
+            <a:noFill/>
+          </a:ln>
+        </p:spPr>
+        <p:style>
+          <a:lnRef idx="1">
+            <a:schemeClr val="accent1"/>
+          </a:lnRef>
+          <a:fillRef idx="3">
+            <a:schemeClr val="accent1"/>
+          </a:fillRef>
+          <a:effectRef idx="2">
+            <a:schemeClr val="accent1"/>
+          </a:effectRef>
+          <a:fontRef idx="minor">
+            <a:schemeClr val="lt1"/>
+          </a:fontRef>
+        </p:style>
+        <p:txBody>
+          <a:bodyPr rtlCol="0" anchor="ctr"/>
+          <a:lstStyle/>
+          <a:p>
+            <a:pPr algn="ctr"/>
+          </a:p>
+        </p:txBody>
+      </p:sp>
+      <p:sp>
+        <p:nvSpPr>
+          <p:cNvPr id="6" name="Rectangle 5"/>
+          <p:cNvSpPr/>
+          <p:nvPr/>
+        </p:nvSpPr>
+        <p:spPr>
+          <a:xfrm>
+            <a:off x="448310" y="6400800"/>
+            <a:ext cx="63500" cy="63500"/>
+          </a:xfrm>
+          <a:prstGeom prst="rect">
+            <a:avLst/>
+          </a:prstGeom>
+          <a:solidFill>
+            <a:srgbClr val="7FBA00"/>
+          </a:solidFill>
+          <a:ln>
+            <a:noFill/>
+          </a:ln>
+        </p:spPr>
+        <p:style>
+          <a:lnRef idx="1">
+            <a:schemeClr val="accent1"/>
+          </a:lnRef>
+          <a:fillRef idx="3">
+            <a:schemeClr val="accent1"/>
+          </a:fillRef>
+          <a:effectRef idx="2">
+            <a:schemeClr val="accent1"/>
+          </a:effectRef>
+          <a:fontRef idx="minor">
+            <a:schemeClr val="lt1"/>
+          </a:fontRef>
+        </p:style>
+        <p:txBody>
+          <a:bodyPr rtlCol="0" anchor="ctr"/>
+          <a:lstStyle/>
+          <a:p>
+            <a:pPr algn="ctr"/>
+          </a:p>
+        </p:txBody>
+      </p:sp>
+      <p:sp>
+        <p:nvSpPr>
+          <p:cNvPr id="7" name="Rectangle 6"/>
+          <p:cNvSpPr/>
+          <p:nvPr/>
+        </p:nvSpPr>
+        <p:spPr>
+          <a:xfrm>
+            <a:off x="365760" y="6483350"/>
+            <a:ext cx="63500" cy="63500"/>
+          </a:xfrm>
+          <a:prstGeom prst="rect">
+            <a:avLst/>
+          </a:prstGeom>
+          <a:solidFill>
+            <a:srgbClr val="00A4EF"/>
+          </a:solidFill>
+          <a:ln>
+            <a:noFill/>
+          </a:ln>
+        </p:spPr>
+        <p:style>
+          <a:lnRef idx="1">
+            <a:schemeClr val="accent1"/>
+          </a:lnRef>
+          <a:fillRef idx="3">
+            <a:schemeClr val="accent1"/>
+          </a:fillRef>
+          <a:effectRef idx="2">
+            <a:schemeClr val="accent1"/>
+          </a:effectRef>
+          <a:fontRef idx="minor">
+            <a:schemeClr val="lt1"/>
+          </a:fontRef>
+        </p:style>
+        <p:txBody>
+          <a:bodyPr rtlCol="0" anchor="ctr"/>
+          <a:lstStyle/>
+          <a:p>
+            <a:pPr algn="ctr"/>
+          </a:p>
+        </p:txBody>
+      </p:sp>
+      <p:sp>
+        <p:nvSpPr>
+          <p:cNvPr id="8" name="Rectangle 7"/>
+          <p:cNvSpPr/>
+          <p:nvPr/>
+        </p:nvSpPr>
+        <p:spPr>
+          <a:xfrm>
+            <a:off x="448310" y="6483350"/>
+            <a:ext cx="63500" cy="63500"/>
+          </a:xfrm>
+          <a:prstGeom prst="rect">
+            <a:avLst/>
+          </a:prstGeom>
+          <a:solidFill>
+            <a:srgbClr val="FFB900"/>
+          </a:solidFill>
+          <a:ln>
+            <a:noFill/>
+          </a:ln>
+        </p:spPr>
+        <p:style>
+          <a:lnRef idx="1">
+            <a:schemeClr val="accent1"/>
+          </a:lnRef>
+          <a:fillRef idx="3">
+            <a:schemeClr val="accent1"/>
+          </a:fillRef>
+          <a:effectRef idx="2">
+            <a:schemeClr val="accent1"/>
+          </a:effectRef>
+          <a:fontRef idx="minor">
+            <a:schemeClr val="lt1"/>
+          </a:fontRef>
+        </p:style>
+        <p:txBody>
+          <a:bodyPr rtlCol="0" anchor="ctr"/>
+          <a:lstStyle/>
+          <a:p>
+            <a:pPr algn="ctr"/>
+          </a:p>
+        </p:txBody>
+      </p:sp>
+      <p:sp>
+        <p:nvSpPr>
+          <p:cNvPr id="9" name="TextBox 8"/>
+          <p:cNvSpPr txBox="1"/>
+          <p:nvPr/>
+        </p:nvSpPr>
+        <p:spPr>
+          <a:xfrm>
+            <a:off x="594360" y="6291072"/>
+            <a:ext cx="1371600" cy="274320"/>
+          </a:xfrm>
+          <a:prstGeom prst="rect">
+            <a:avLst/>
+          </a:prstGeom>
+          <a:noFill/>
+        </p:spPr>
+        <p:txBody>
+          <a:bodyPr wrap="none">
+            <a:spAutoFit/>
+          </a:bodyPr>
+          <a:lstStyle/>
+          <a:p>
+            <a:pPr algn="l">
+              <a:defRPr sz="1100">
+                <a:solidFill>
+                  <a:srgbClr val="000000"/>
+                </a:solidFill>
+                <a:latin typeface="Segoe UI"/>
+              </a:defRPr>
+            </a:pPr>
+            <a:r>
+              <a:t>Microsoft</a:t>
+            </a:r>
+          </a:p>
+        </p:txBody>
+      </p:sp>
+      <p:sp>
+        <p:nvSpPr>
+          <p:cNvPr id="10" name="TextBox 9"/>
+          <p:cNvSpPr txBox="1"/>
+          <p:nvPr/>
+        </p:nvSpPr>
+        <p:spPr>
+          <a:xfrm>
+            <a:off x="7772400" y="6291072"/>
+            <a:ext cx="4114800" cy="274320"/>
+          </a:xfrm>
+          <a:prstGeom prst="rect">
+            <a:avLst/>
+          </a:prstGeom>
+          <a:noFill/>
+        </p:spPr>
+        <p:txBody>
+          <a:bodyPr wrap="none">
+            <a:spAutoFit/>
+          </a:bodyPr>
+          <a:lstStyle/>
+          <a:p>
+            <a:pPr algn="r">
+              <a:defRPr sz="1000">
+                <a:solidFill>
+                  <a:srgbClr val="000000"/>
+                </a:solidFill>
+                <a:latin typeface="Segoe UI"/>
+              </a:defRPr>
+            </a:pPr>
+            <a:r>
+              <a:t>Agent 365  |  Proof of Value</a:t>
+            </a:r>
+          </a:p>
+        </p:txBody>
+      </p:sp>
+    </p:spTree>
+  </p:cSld>
+  <p:clrMapOvr>
+    <a:masterClrMapping/>
+  </p:clrMapOvr>
+</p:sld>
+</file>
+
+<file path=ppt/slides/slide33.xml><?xml version="1.0" encoding="utf-8"?>
 <p:sld xmlns:a="http://schemas.openxmlformats.org/drawingml/2006/main" xmlns:p="http://schemas.openxmlformats.org/presentationml/2006/main" xmlns:r="http://schemas.openxmlformats.org/officeDocument/2006/relationships" show="0">
   <p:cSld>
     <p:bg>
@@ -17551,7 +18638,7 @@
 </p:sld>
 </file>
 
-<file path=ppt/slides/slide32.xml><?xml version="1.0" encoding="utf-8"?>
+<file path=ppt/slides/slide34.xml><?xml version="1.0" encoding="utf-8"?>
 <p:sld xmlns:a="http://schemas.openxmlformats.org/drawingml/2006/main" xmlns:p="http://schemas.openxmlformats.org/presentationml/2006/main" xmlns:r="http://schemas.openxmlformats.org/officeDocument/2006/relationships">
   <p:cSld>
     <p:bg>
@@ -17868,939 +18955,6 @@
             </a:pPr>
             <a:r>
               <a:t>Productivity Integration</a:t>
-            </a:r>
-          </a:p>
-        </p:txBody>
-      </p:sp>
-    </p:spTree>
-  </p:cSld>
-  <p:clrMapOvr>
-    <a:masterClrMapping/>
-  </p:clrMapOvr>
-</p:sld>
-</file>
-
-<file path=ppt/slides/slide33.xml><?xml version="1.0" encoding="utf-8"?>
-<p:sld xmlns:a="http://schemas.openxmlformats.org/drawingml/2006/main" xmlns:p="http://schemas.openxmlformats.org/presentationml/2006/main" xmlns:r="http://schemas.openxmlformats.org/officeDocument/2006/relationships">
-  <p:cSld>
-    <p:bg>
-      <p:bgPr>
-        <a:solidFill>
-          <a:srgbClr val="FFFFFF"/>
-        </a:solidFill>
-        <a:effectLst/>
-      </p:bgPr>
-    </p:bg>
-    <p:spTree>
-      <p:nvGrpSpPr>
-        <p:cNvPr id="1" name=""/>
-        <p:cNvGrpSpPr/>
-        <p:nvPr/>
-      </p:nvGrpSpPr>
-      <p:grpSpPr/>
-      <p:sp>
-        <p:nvSpPr>
-          <p:cNvPr id="2" name="Rectangle 1"/>
-          <p:cNvSpPr/>
-          <p:nvPr/>
-        </p:nvSpPr>
-        <p:spPr>
-          <a:xfrm>
-            <a:off x="457200" y="457200"/>
-            <a:ext cx="109220" cy="508000"/>
-          </a:xfrm>
-          <a:prstGeom prst="rect">
-            <a:avLst/>
-          </a:prstGeom>
-          <a:solidFill>
-            <a:srgbClr val="0078D4"/>
-          </a:solidFill>
-          <a:ln>
-            <a:noFill/>
-          </a:ln>
-        </p:spPr>
-        <p:style>
-          <a:lnRef idx="1">
-            <a:schemeClr val="accent1"/>
-          </a:lnRef>
-          <a:fillRef idx="3">
-            <a:schemeClr val="accent1"/>
-          </a:fillRef>
-          <a:effectRef idx="2">
-            <a:schemeClr val="accent1"/>
-          </a:effectRef>
-          <a:fontRef idx="minor">
-            <a:schemeClr val="lt1"/>
-          </a:fontRef>
-        </p:style>
-        <p:txBody>
-          <a:bodyPr rtlCol="0" anchor="ctr"/>
-          <a:lstStyle/>
-          <a:p>
-            <a:pPr algn="ctr"/>
-          </a:p>
-        </p:txBody>
-      </p:sp>
-      <p:sp>
-        <p:nvSpPr>
-          <p:cNvPr id="3" name="TextBox 2"/>
-          <p:cNvSpPr txBox="1"/>
-          <p:nvPr/>
-        </p:nvSpPr>
-        <p:spPr>
-          <a:xfrm>
-            <a:off x="658368" y="365760"/>
-            <a:ext cx="10515600" cy="640080"/>
-          </a:xfrm>
-          <a:prstGeom prst="rect">
-            <a:avLst/>
-          </a:prstGeom>
-          <a:noFill/>
-        </p:spPr>
-        <p:txBody>
-          <a:bodyPr wrap="square" anchor="ctr">
-            <a:spAutoFit/>
-          </a:bodyPr>
-          <a:lstStyle/>
-          <a:p>
-            <a:pPr algn="l">
-              <a:defRPr sz="2600" b="0">
-                <a:solidFill>
-                  <a:srgbClr val="000000"/>
-                </a:solidFill>
-                <a:latin typeface="Segoe UI Semibold"/>
-              </a:defRPr>
-            </a:pPr>
-            <a:r>
-              <a:t>Agents in Outlook, Teams, Word, and SharePoint — Governed or Ungoverned?</a:t>
-            </a:r>
-          </a:p>
-        </p:txBody>
-      </p:sp>
-      <p:sp>
-        <p:nvSpPr>
-          <p:cNvPr id="4" name="TextBox 3"/>
-          <p:cNvSpPr txBox="1"/>
-          <p:nvPr/>
-        </p:nvSpPr>
-        <p:spPr>
-          <a:xfrm>
-            <a:off x="658368" y="1280160"/>
-            <a:ext cx="10515600" cy="4572000"/>
-          </a:xfrm>
-          <a:prstGeom prst="rect">
-            <a:avLst/>
-          </a:prstGeom>
-          <a:noFill/>
-        </p:spPr>
-        <p:txBody>
-          <a:bodyPr wrap="square">
-            <a:spAutoFit/>
-          </a:bodyPr>
-          <a:lstStyle/>
-          <a:p>
-            <a:pPr marL="228600" indent="-228600">
-              <a:spcBef>
-                <a:spcPts val="400"/>
-              </a:spcBef>
-              <a:spcAft>
-                <a:spcPts val="1000"/>
-              </a:spcAft>
-              <a:defRPr sz="1400">
-                <a:solidFill>
-                  <a:srgbClr val="000000"/>
-                </a:solidFill>
-                <a:latin typeface="Segoe UI Semibold"/>
-              </a:defRPr>
-              <a:buFont typeface="Arial"/>
-              <a:buChar char="•"/>
-            </a:pPr>
-            <a:r>
-              <a:t>AI agents increasingly operate within productivity tools — drafting emails, posting in Teams, editing documents</a:t>
-            </a:r>
-          </a:p>
-          <a:p>
-            <a:pPr marL="228600" indent="-228600">
-              <a:spcBef>
-                <a:spcPts val="400"/>
-              </a:spcBef>
-              <a:spcAft>
-                <a:spcPts val="1000"/>
-              </a:spcAft>
-              <a:defRPr sz="1400">
-                <a:solidFill>
-                  <a:srgbClr val="000000"/>
-                </a:solidFill>
-                <a:latin typeface="Segoe UI Semibold"/>
-              </a:defRPr>
-              <a:buFont typeface="Arial"/>
-              <a:buChar char="•"/>
-            </a:pPr>
-            <a:r>
-              <a:t>Without governance, these agents act with unbounded access across your collaboration surface</a:t>
-            </a:r>
-          </a:p>
-          <a:p>
-            <a:pPr marL="228600" indent="-228600">
-              <a:spcBef>
-                <a:spcPts val="400"/>
-              </a:spcBef>
-              <a:spcAft>
-                <a:spcPts val="1000"/>
-              </a:spcAft>
-              <a:defRPr sz="1400">
-                <a:solidFill>
-                  <a:srgbClr val="000000"/>
-                </a:solidFill>
-                <a:latin typeface="Segoe UI Semibold"/>
-              </a:defRPr>
-              <a:buFont typeface="Arial"/>
-              <a:buChar char="•"/>
-            </a:pPr>
-            <a:r>
-              <a:t>Agent 365 enables governed connections with real-time allow/block enforcement</a:t>
-            </a:r>
-          </a:p>
-          <a:p>
-            <a:pPr marL="228600" indent="-228600">
-              <a:spcBef>
-                <a:spcPts val="400"/>
-              </a:spcBef>
-              <a:spcAft>
-                <a:spcPts val="1000"/>
-              </a:spcAft>
-              <a:defRPr sz="1400">
-                <a:solidFill>
-                  <a:srgbClr val="000000"/>
-                </a:solidFill>
-                <a:latin typeface="Segoe UI Semibold"/>
-              </a:defRPr>
-              <a:buFont typeface="Arial"/>
-              <a:buChar char="•"/>
-            </a:pPr>
-            <a:r>
-              <a:t>Same productivity surface users know — no separate agent UI or plug-in</a:t>
-            </a:r>
-          </a:p>
-        </p:txBody>
-      </p:sp>
-      <p:sp>
-        <p:nvSpPr>
-          <p:cNvPr id="5" name="Rectangle 4"/>
-          <p:cNvSpPr/>
-          <p:nvPr/>
-        </p:nvSpPr>
-        <p:spPr>
-          <a:xfrm>
-            <a:off x="365760" y="6400800"/>
-            <a:ext cx="63500" cy="63500"/>
-          </a:xfrm>
-          <a:prstGeom prst="rect">
-            <a:avLst/>
-          </a:prstGeom>
-          <a:solidFill>
-            <a:srgbClr val="F25022"/>
-          </a:solidFill>
-          <a:ln>
-            <a:noFill/>
-          </a:ln>
-        </p:spPr>
-        <p:style>
-          <a:lnRef idx="1">
-            <a:schemeClr val="accent1"/>
-          </a:lnRef>
-          <a:fillRef idx="3">
-            <a:schemeClr val="accent1"/>
-          </a:fillRef>
-          <a:effectRef idx="2">
-            <a:schemeClr val="accent1"/>
-          </a:effectRef>
-          <a:fontRef idx="minor">
-            <a:schemeClr val="lt1"/>
-          </a:fontRef>
-        </p:style>
-        <p:txBody>
-          <a:bodyPr rtlCol="0" anchor="ctr"/>
-          <a:lstStyle/>
-          <a:p>
-            <a:pPr algn="ctr"/>
-          </a:p>
-        </p:txBody>
-      </p:sp>
-      <p:sp>
-        <p:nvSpPr>
-          <p:cNvPr id="6" name="Rectangle 5"/>
-          <p:cNvSpPr/>
-          <p:nvPr/>
-        </p:nvSpPr>
-        <p:spPr>
-          <a:xfrm>
-            <a:off x="448310" y="6400800"/>
-            <a:ext cx="63500" cy="63500"/>
-          </a:xfrm>
-          <a:prstGeom prst="rect">
-            <a:avLst/>
-          </a:prstGeom>
-          <a:solidFill>
-            <a:srgbClr val="7FBA00"/>
-          </a:solidFill>
-          <a:ln>
-            <a:noFill/>
-          </a:ln>
-        </p:spPr>
-        <p:style>
-          <a:lnRef idx="1">
-            <a:schemeClr val="accent1"/>
-          </a:lnRef>
-          <a:fillRef idx="3">
-            <a:schemeClr val="accent1"/>
-          </a:fillRef>
-          <a:effectRef idx="2">
-            <a:schemeClr val="accent1"/>
-          </a:effectRef>
-          <a:fontRef idx="minor">
-            <a:schemeClr val="lt1"/>
-          </a:fontRef>
-        </p:style>
-        <p:txBody>
-          <a:bodyPr rtlCol="0" anchor="ctr"/>
-          <a:lstStyle/>
-          <a:p>
-            <a:pPr algn="ctr"/>
-          </a:p>
-        </p:txBody>
-      </p:sp>
-      <p:sp>
-        <p:nvSpPr>
-          <p:cNvPr id="7" name="Rectangle 6"/>
-          <p:cNvSpPr/>
-          <p:nvPr/>
-        </p:nvSpPr>
-        <p:spPr>
-          <a:xfrm>
-            <a:off x="365760" y="6483350"/>
-            <a:ext cx="63500" cy="63500"/>
-          </a:xfrm>
-          <a:prstGeom prst="rect">
-            <a:avLst/>
-          </a:prstGeom>
-          <a:solidFill>
-            <a:srgbClr val="00A4EF"/>
-          </a:solidFill>
-          <a:ln>
-            <a:noFill/>
-          </a:ln>
-        </p:spPr>
-        <p:style>
-          <a:lnRef idx="1">
-            <a:schemeClr val="accent1"/>
-          </a:lnRef>
-          <a:fillRef idx="3">
-            <a:schemeClr val="accent1"/>
-          </a:fillRef>
-          <a:effectRef idx="2">
-            <a:schemeClr val="accent1"/>
-          </a:effectRef>
-          <a:fontRef idx="minor">
-            <a:schemeClr val="lt1"/>
-          </a:fontRef>
-        </p:style>
-        <p:txBody>
-          <a:bodyPr rtlCol="0" anchor="ctr"/>
-          <a:lstStyle/>
-          <a:p>
-            <a:pPr algn="ctr"/>
-          </a:p>
-        </p:txBody>
-      </p:sp>
-      <p:sp>
-        <p:nvSpPr>
-          <p:cNvPr id="8" name="Rectangle 7"/>
-          <p:cNvSpPr/>
-          <p:nvPr/>
-        </p:nvSpPr>
-        <p:spPr>
-          <a:xfrm>
-            <a:off x="448310" y="6483350"/>
-            <a:ext cx="63500" cy="63500"/>
-          </a:xfrm>
-          <a:prstGeom prst="rect">
-            <a:avLst/>
-          </a:prstGeom>
-          <a:solidFill>
-            <a:srgbClr val="FFB900"/>
-          </a:solidFill>
-          <a:ln>
-            <a:noFill/>
-          </a:ln>
-        </p:spPr>
-        <p:style>
-          <a:lnRef idx="1">
-            <a:schemeClr val="accent1"/>
-          </a:lnRef>
-          <a:fillRef idx="3">
-            <a:schemeClr val="accent1"/>
-          </a:fillRef>
-          <a:effectRef idx="2">
-            <a:schemeClr val="accent1"/>
-          </a:effectRef>
-          <a:fontRef idx="minor">
-            <a:schemeClr val="lt1"/>
-          </a:fontRef>
-        </p:style>
-        <p:txBody>
-          <a:bodyPr rtlCol="0" anchor="ctr"/>
-          <a:lstStyle/>
-          <a:p>
-            <a:pPr algn="ctr"/>
-          </a:p>
-        </p:txBody>
-      </p:sp>
-      <p:sp>
-        <p:nvSpPr>
-          <p:cNvPr id="9" name="TextBox 8"/>
-          <p:cNvSpPr txBox="1"/>
-          <p:nvPr/>
-        </p:nvSpPr>
-        <p:spPr>
-          <a:xfrm>
-            <a:off x="594360" y="6291072"/>
-            <a:ext cx="1371600" cy="274320"/>
-          </a:xfrm>
-          <a:prstGeom prst="rect">
-            <a:avLst/>
-          </a:prstGeom>
-          <a:noFill/>
-        </p:spPr>
-        <p:txBody>
-          <a:bodyPr wrap="none">
-            <a:spAutoFit/>
-          </a:bodyPr>
-          <a:lstStyle/>
-          <a:p>
-            <a:pPr algn="l">
-              <a:defRPr sz="1100">
-                <a:solidFill>
-                  <a:srgbClr val="000000"/>
-                </a:solidFill>
-                <a:latin typeface="Segoe UI"/>
-              </a:defRPr>
-            </a:pPr>
-            <a:r>
-              <a:t>Microsoft</a:t>
-            </a:r>
-          </a:p>
-        </p:txBody>
-      </p:sp>
-      <p:sp>
-        <p:nvSpPr>
-          <p:cNvPr id="10" name="TextBox 9"/>
-          <p:cNvSpPr txBox="1"/>
-          <p:nvPr/>
-        </p:nvSpPr>
-        <p:spPr>
-          <a:xfrm>
-            <a:off x="7772400" y="6291072"/>
-            <a:ext cx="4114800" cy="274320"/>
-          </a:xfrm>
-          <a:prstGeom prst="rect">
-            <a:avLst/>
-          </a:prstGeom>
-          <a:noFill/>
-        </p:spPr>
-        <p:txBody>
-          <a:bodyPr wrap="none">
-            <a:spAutoFit/>
-          </a:bodyPr>
-          <a:lstStyle/>
-          <a:p>
-            <a:pPr algn="r">
-              <a:defRPr sz="1000">
-                <a:solidFill>
-                  <a:srgbClr val="000000"/>
-                </a:solidFill>
-                <a:latin typeface="Segoe UI"/>
-              </a:defRPr>
-            </a:pPr>
-            <a:r>
-              <a:t>Agent 365  |  Proof of Value</a:t>
-            </a:r>
-          </a:p>
-        </p:txBody>
-      </p:sp>
-    </p:spTree>
-  </p:cSld>
-  <p:clrMapOvr>
-    <a:masterClrMapping/>
-  </p:clrMapOvr>
-</p:sld>
-</file>
-
-<file path=ppt/slides/slide34.xml><?xml version="1.0" encoding="utf-8"?>
-<p:sld xmlns:a="http://schemas.openxmlformats.org/drawingml/2006/main" xmlns:p="http://schemas.openxmlformats.org/presentationml/2006/main" xmlns:r="http://schemas.openxmlformats.org/officeDocument/2006/relationships">
-  <p:cSld>
-    <p:bg>
-      <p:bgPr>
-        <a:solidFill>
-          <a:srgbClr val="FFFFFF"/>
-        </a:solidFill>
-        <a:effectLst/>
-      </p:bgPr>
-    </p:bg>
-    <p:spTree>
-      <p:nvGrpSpPr>
-        <p:cNvPr id="1" name=""/>
-        <p:cNvGrpSpPr/>
-        <p:nvPr/>
-      </p:nvGrpSpPr>
-      <p:grpSpPr/>
-      <p:sp>
-        <p:nvSpPr>
-          <p:cNvPr id="2" name="Rectangle 1"/>
-          <p:cNvSpPr/>
-          <p:nvPr/>
-        </p:nvSpPr>
-        <p:spPr>
-          <a:xfrm>
-            <a:off x="457200" y="457200"/>
-            <a:ext cx="109220" cy="508000"/>
-          </a:xfrm>
-          <a:prstGeom prst="rect">
-            <a:avLst/>
-          </a:prstGeom>
-          <a:solidFill>
-            <a:srgbClr val="0078D4"/>
-          </a:solidFill>
-          <a:ln>
-            <a:noFill/>
-          </a:ln>
-        </p:spPr>
-        <p:style>
-          <a:lnRef idx="1">
-            <a:schemeClr val="accent1"/>
-          </a:lnRef>
-          <a:fillRef idx="3">
-            <a:schemeClr val="accent1"/>
-          </a:fillRef>
-          <a:effectRef idx="2">
-            <a:schemeClr val="accent1"/>
-          </a:effectRef>
-          <a:fontRef idx="minor">
-            <a:schemeClr val="lt1"/>
-          </a:fontRef>
-        </p:style>
-        <p:txBody>
-          <a:bodyPr rtlCol="0" anchor="ctr"/>
-          <a:lstStyle/>
-          <a:p>
-            <a:pPr algn="ctr"/>
-          </a:p>
-        </p:txBody>
-      </p:sp>
-      <p:sp>
-        <p:nvSpPr>
-          <p:cNvPr id="3" name="TextBox 2"/>
-          <p:cNvSpPr txBox="1"/>
-          <p:nvPr/>
-        </p:nvSpPr>
-        <p:spPr>
-          <a:xfrm>
-            <a:off x="658368" y="365760"/>
-            <a:ext cx="10515600" cy="640080"/>
-          </a:xfrm>
-          <a:prstGeom prst="rect">
-            <a:avLst/>
-          </a:prstGeom>
-          <a:noFill/>
-        </p:spPr>
-        <p:txBody>
-          <a:bodyPr wrap="square" anchor="ctr">
-            <a:spAutoFit/>
-          </a:bodyPr>
-          <a:lstStyle/>
-          <a:p>
-            <a:pPr algn="l">
-              <a:defRPr sz="2600" b="0">
-                <a:solidFill>
-                  <a:srgbClr val="000000"/>
-                </a:solidFill>
-                <a:latin typeface="Segoe UI Semibold"/>
-              </a:defRPr>
-            </a:pPr>
-            <a:r>
-              <a:t>Live Demo: Governed Agent Actions in M365 Apps</a:t>
-            </a:r>
-          </a:p>
-        </p:txBody>
-      </p:sp>
-      <p:sp>
-        <p:nvSpPr>
-          <p:cNvPr id="4" name="TextBox 3"/>
-          <p:cNvSpPr txBox="1"/>
-          <p:nvPr/>
-        </p:nvSpPr>
-        <p:spPr>
-          <a:xfrm>
-            <a:off x="658368" y="1280160"/>
-            <a:ext cx="10515600" cy="4572000"/>
-          </a:xfrm>
-          <a:prstGeom prst="rect">
-            <a:avLst/>
-          </a:prstGeom>
-          <a:noFill/>
-        </p:spPr>
-        <p:txBody>
-          <a:bodyPr wrap="square">
-            <a:spAutoFit/>
-          </a:bodyPr>
-          <a:lstStyle/>
-          <a:p>
-            <a:pPr marL="228600" indent="-228600">
-              <a:spcBef>
-                <a:spcPts val="400"/>
-              </a:spcBef>
-              <a:spcAft>
-                <a:spcPts val="1000"/>
-              </a:spcAft>
-              <a:defRPr sz="1400">
-                <a:solidFill>
-                  <a:srgbClr val="000000"/>
-                </a:solidFill>
-                <a:latin typeface="Segoe UI Semibold"/>
-              </a:defRPr>
-              <a:buFont typeface="Arial"/>
-              <a:buChar char="•"/>
-            </a:pPr>
-            <a:r>
-              <a:t>Deploy a test agent with connections to Teams and SharePoint</a:t>
-            </a:r>
-          </a:p>
-          <a:p>
-            <a:pPr marL="228600" indent="-228600">
-              <a:spcBef>
-                <a:spcPts val="400"/>
-              </a:spcBef>
-              <a:spcAft>
-                <a:spcPts val="1000"/>
-              </a:spcAft>
-              <a:defRPr sz="1400">
-                <a:solidFill>
-                  <a:srgbClr val="000000"/>
-                </a:solidFill>
-                <a:latin typeface="Segoe UI Semibold"/>
-              </a:defRPr>
-              <a:buFont typeface="Arial"/>
-              <a:buChar char="•"/>
-            </a:pPr>
-            <a:r>
-              <a:t>Configure allow/block policies for specific agent actions</a:t>
-            </a:r>
-          </a:p>
-          <a:p>
-            <a:pPr marL="228600" indent="-228600">
-              <a:spcBef>
-                <a:spcPts val="400"/>
-              </a:spcBef>
-              <a:spcAft>
-                <a:spcPts val="1000"/>
-              </a:spcAft>
-              <a:defRPr sz="1400">
-                <a:solidFill>
-                  <a:srgbClr val="000000"/>
-                </a:solidFill>
-                <a:latin typeface="Segoe UI Semibold"/>
-              </a:defRPr>
-              <a:buFont typeface="Arial"/>
-              <a:buChar char="•"/>
-            </a:pPr>
-            <a:r>
-              <a:t>Trigger an allowed action — agent posts summary to a Teams channel</a:t>
-            </a:r>
-          </a:p>
-          <a:p>
-            <a:pPr marL="228600" indent="-228600">
-              <a:spcBef>
-                <a:spcPts val="400"/>
-              </a:spcBef>
-              <a:spcAft>
-                <a:spcPts val="1000"/>
-              </a:spcAft>
-              <a:defRPr sz="1400">
-                <a:solidFill>
-                  <a:srgbClr val="000000"/>
-                </a:solidFill>
-                <a:latin typeface="Segoe UI Semibold"/>
-              </a:defRPr>
-              <a:buFont typeface="Arial"/>
-              <a:buChar char="•"/>
-            </a:pPr>
-            <a:r>
-              <a:t>Trigger a blocked action — agent attempts to share externally</a:t>
-            </a:r>
-          </a:p>
-          <a:p>
-            <a:pPr marL="228600" indent="-228600">
-              <a:spcBef>
-                <a:spcPts val="400"/>
-              </a:spcBef>
-              <a:spcAft>
-                <a:spcPts val="1000"/>
-              </a:spcAft>
-              <a:defRPr sz="1400">
-                <a:solidFill>
-                  <a:srgbClr val="000000"/>
-                </a:solidFill>
-                <a:latin typeface="Segoe UI Semibold"/>
-              </a:defRPr>
-              <a:buFont typeface="Arial"/>
-              <a:buChar char="•"/>
-            </a:pPr>
-            <a:r>
-              <a:t>Observe real-time enforcement and audit trail for both actions</a:t>
-            </a:r>
-          </a:p>
-        </p:txBody>
-      </p:sp>
-      <p:sp>
-        <p:nvSpPr>
-          <p:cNvPr id="5" name="Rectangle 4"/>
-          <p:cNvSpPr/>
-          <p:nvPr/>
-        </p:nvSpPr>
-        <p:spPr>
-          <a:xfrm>
-            <a:off x="365760" y="6400800"/>
-            <a:ext cx="63500" cy="63500"/>
-          </a:xfrm>
-          <a:prstGeom prst="rect">
-            <a:avLst/>
-          </a:prstGeom>
-          <a:solidFill>
-            <a:srgbClr val="F25022"/>
-          </a:solidFill>
-          <a:ln>
-            <a:noFill/>
-          </a:ln>
-        </p:spPr>
-        <p:style>
-          <a:lnRef idx="1">
-            <a:schemeClr val="accent1"/>
-          </a:lnRef>
-          <a:fillRef idx="3">
-            <a:schemeClr val="accent1"/>
-          </a:fillRef>
-          <a:effectRef idx="2">
-            <a:schemeClr val="accent1"/>
-          </a:effectRef>
-          <a:fontRef idx="minor">
-            <a:schemeClr val="lt1"/>
-          </a:fontRef>
-        </p:style>
-        <p:txBody>
-          <a:bodyPr rtlCol="0" anchor="ctr"/>
-          <a:lstStyle/>
-          <a:p>
-            <a:pPr algn="ctr"/>
-          </a:p>
-        </p:txBody>
-      </p:sp>
-      <p:sp>
-        <p:nvSpPr>
-          <p:cNvPr id="6" name="Rectangle 5"/>
-          <p:cNvSpPr/>
-          <p:nvPr/>
-        </p:nvSpPr>
-        <p:spPr>
-          <a:xfrm>
-            <a:off x="448310" y="6400800"/>
-            <a:ext cx="63500" cy="63500"/>
-          </a:xfrm>
-          <a:prstGeom prst="rect">
-            <a:avLst/>
-          </a:prstGeom>
-          <a:solidFill>
-            <a:srgbClr val="7FBA00"/>
-          </a:solidFill>
-          <a:ln>
-            <a:noFill/>
-          </a:ln>
-        </p:spPr>
-        <p:style>
-          <a:lnRef idx="1">
-            <a:schemeClr val="accent1"/>
-          </a:lnRef>
-          <a:fillRef idx="3">
-            <a:schemeClr val="accent1"/>
-          </a:fillRef>
-          <a:effectRef idx="2">
-            <a:schemeClr val="accent1"/>
-          </a:effectRef>
-          <a:fontRef idx="minor">
-            <a:schemeClr val="lt1"/>
-          </a:fontRef>
-        </p:style>
-        <p:txBody>
-          <a:bodyPr rtlCol="0" anchor="ctr"/>
-          <a:lstStyle/>
-          <a:p>
-            <a:pPr algn="ctr"/>
-          </a:p>
-        </p:txBody>
-      </p:sp>
-      <p:sp>
-        <p:nvSpPr>
-          <p:cNvPr id="7" name="Rectangle 6"/>
-          <p:cNvSpPr/>
-          <p:nvPr/>
-        </p:nvSpPr>
-        <p:spPr>
-          <a:xfrm>
-            <a:off x="365760" y="6483350"/>
-            <a:ext cx="63500" cy="63500"/>
-          </a:xfrm>
-          <a:prstGeom prst="rect">
-            <a:avLst/>
-          </a:prstGeom>
-          <a:solidFill>
-            <a:srgbClr val="00A4EF"/>
-          </a:solidFill>
-          <a:ln>
-            <a:noFill/>
-          </a:ln>
-        </p:spPr>
-        <p:style>
-          <a:lnRef idx="1">
-            <a:schemeClr val="accent1"/>
-          </a:lnRef>
-          <a:fillRef idx="3">
-            <a:schemeClr val="accent1"/>
-          </a:fillRef>
-          <a:effectRef idx="2">
-            <a:schemeClr val="accent1"/>
-          </a:effectRef>
-          <a:fontRef idx="minor">
-            <a:schemeClr val="lt1"/>
-          </a:fontRef>
-        </p:style>
-        <p:txBody>
-          <a:bodyPr rtlCol="0" anchor="ctr"/>
-          <a:lstStyle/>
-          <a:p>
-            <a:pPr algn="ctr"/>
-          </a:p>
-        </p:txBody>
-      </p:sp>
-      <p:sp>
-        <p:nvSpPr>
-          <p:cNvPr id="8" name="Rectangle 7"/>
-          <p:cNvSpPr/>
-          <p:nvPr/>
-        </p:nvSpPr>
-        <p:spPr>
-          <a:xfrm>
-            <a:off x="448310" y="6483350"/>
-            <a:ext cx="63500" cy="63500"/>
-          </a:xfrm>
-          <a:prstGeom prst="rect">
-            <a:avLst/>
-          </a:prstGeom>
-          <a:solidFill>
-            <a:srgbClr val="FFB900"/>
-          </a:solidFill>
-          <a:ln>
-            <a:noFill/>
-          </a:ln>
-        </p:spPr>
-        <p:style>
-          <a:lnRef idx="1">
-            <a:schemeClr val="accent1"/>
-          </a:lnRef>
-          <a:fillRef idx="3">
-            <a:schemeClr val="accent1"/>
-          </a:fillRef>
-          <a:effectRef idx="2">
-            <a:schemeClr val="accent1"/>
-          </a:effectRef>
-          <a:fontRef idx="minor">
-            <a:schemeClr val="lt1"/>
-          </a:fontRef>
-        </p:style>
-        <p:txBody>
-          <a:bodyPr rtlCol="0" anchor="ctr"/>
-          <a:lstStyle/>
-          <a:p>
-            <a:pPr algn="ctr"/>
-          </a:p>
-        </p:txBody>
-      </p:sp>
-      <p:sp>
-        <p:nvSpPr>
-          <p:cNvPr id="9" name="TextBox 8"/>
-          <p:cNvSpPr txBox="1"/>
-          <p:nvPr/>
-        </p:nvSpPr>
-        <p:spPr>
-          <a:xfrm>
-            <a:off x="594360" y="6291072"/>
-            <a:ext cx="1371600" cy="274320"/>
-          </a:xfrm>
-          <a:prstGeom prst="rect">
-            <a:avLst/>
-          </a:prstGeom>
-          <a:noFill/>
-        </p:spPr>
-        <p:txBody>
-          <a:bodyPr wrap="none">
-            <a:spAutoFit/>
-          </a:bodyPr>
-          <a:lstStyle/>
-          <a:p>
-            <a:pPr algn="l">
-              <a:defRPr sz="1100">
-                <a:solidFill>
-                  <a:srgbClr val="000000"/>
-                </a:solidFill>
-                <a:latin typeface="Segoe UI"/>
-              </a:defRPr>
-            </a:pPr>
-            <a:r>
-              <a:t>Microsoft</a:t>
-            </a:r>
-          </a:p>
-        </p:txBody>
-      </p:sp>
-      <p:sp>
-        <p:nvSpPr>
-          <p:cNvPr id="10" name="TextBox 9"/>
-          <p:cNvSpPr txBox="1"/>
-          <p:nvPr/>
-        </p:nvSpPr>
-        <p:spPr>
-          <a:xfrm>
-            <a:off x="7772400" y="6291072"/>
-            <a:ext cx="4114800" cy="274320"/>
-          </a:xfrm>
-          <a:prstGeom prst="rect">
-            <a:avLst/>
-          </a:prstGeom>
-          <a:noFill/>
-        </p:spPr>
-        <p:txBody>
-          <a:bodyPr wrap="none">
-            <a:spAutoFit/>
-          </a:bodyPr>
-          <a:lstStyle/>
-          <a:p>
-            <a:pPr algn="r">
-              <a:defRPr sz="1000">
-                <a:solidFill>
-                  <a:srgbClr val="000000"/>
-                </a:solidFill>
-                <a:latin typeface="Segoe UI"/>
-              </a:defRPr>
-            </a:pPr>
-            <a:r>
-              <a:t>Agent 365  |  Proof of Value</a:t>
             </a:r>
           </a:p>
         </p:txBody>
@@ -18905,7 +19059,7 @@
               </a:defRPr>
             </a:pPr>
             <a:r>
-              <a:t>How We Measure Success for Productivity Integration</a:t>
+              <a:t>Agents in Outlook, Teams, Word, and SharePoint — Governed or Ungoverned?</a:t>
             </a:r>
           </a:p>
         </p:txBody>
@@ -18949,7 +19103,7 @@
               <a:buChar char="•"/>
             </a:pPr>
             <a:r>
-              <a:t>Agent successfully operates within allowed boundaries in Outlook, Teams, Word, and/or SharePoint</a:t>
+              <a:t>AI agents increasingly operate within productivity tools — drafting emails, posting in Teams, editing documents</a:t>
             </a:r>
           </a:p>
           <a:p>
@@ -18970,7 +19124,7 @@
               <a:buChar char="•"/>
             </a:pPr>
             <a:r>
-              <a:t>Blocked actions are denied in real time (sub-second enforcement)</a:t>
+              <a:t>Without governance, these agents act with unbounded access across your collaboration surface</a:t>
             </a:r>
           </a:p>
           <a:p>
@@ -18991,7 +19145,7 @@
               <a:buChar char="•"/>
             </a:pPr>
             <a:r>
-              <a:t>Allow/block policies can be changed and take effect without redeploying the agent</a:t>
+              <a:t>Agent 365 enables governed connections with real-time allow/block enforcement</a:t>
             </a:r>
           </a:p>
           <a:p>
@@ -19012,28 +19166,7 @@
               <a:buChar char="•"/>
             </a:pPr>
             <a:r>
-              <a:t>Audit trail captures both allowed and blocked actions with full context</a:t>
-            </a:r>
-          </a:p>
-          <a:p>
-            <a:pPr marL="228600" indent="-228600">
-              <a:spcBef>
-                <a:spcPts val="400"/>
-              </a:spcBef>
-              <a:spcAft>
-                <a:spcPts val="1000"/>
-              </a:spcAft>
-              <a:defRPr sz="1400">
-                <a:solidFill>
-                  <a:srgbClr val="000000"/>
-                </a:solidFill>
-                <a:latin typeface="Segoe UI Semibold"/>
-              </a:defRPr>
-              <a:buFont typeface="Arial"/>
-              <a:buChar char="•"/>
-            </a:pPr>
-            <a:r>
-              <a:t>End users experience no disruption — governance is invisible to them</a:t>
+              <a:t>Same productivity surface users know — no separate agent UI or plug-in</a:t>
             </a:r>
           </a:p>
         </p:txBody>
@@ -19382,7 +19515,7 @@
               </a:defRPr>
             </a:pPr>
             <a:r>
-              <a:t>Why This Matters: No Separate Agent UI</a:t>
+              <a:t>Live Demo: Governed Agent Actions in M365 Apps</a:t>
             </a:r>
           </a:p>
         </p:txBody>
@@ -19426,7 +19559,7 @@
               <a:buChar char="•"/>
             </a:pPr>
             <a:r>
-              <a:t>Agents operate natively within M365 apps — no separate interface for users to learn</a:t>
+              <a:t>Deploy a test agent with connections to Teams and SharePoint</a:t>
             </a:r>
           </a:p>
           <a:p>
@@ -19447,7 +19580,7 @@
               <a:buChar char="•"/>
             </a:pPr>
             <a:r>
-              <a:t>Governance is platform-level — not a per-app plug-in that can be bypassed</a:t>
+              <a:t>Configure allow/block policies for specific agent actions</a:t>
             </a:r>
           </a:p>
           <a:p>
@@ -19468,7 +19601,7 @@
               <a:buChar char="•"/>
             </a:pPr>
             <a:r>
-              <a:t>Allow/block enforcement is real-time and centrally managed</a:t>
+              <a:t>Trigger an allowed action — agent posts summary to a Teams channel</a:t>
             </a:r>
           </a:p>
           <a:p>
@@ -19489,7 +19622,7 @@
               <a:buChar char="•"/>
             </a:pPr>
             <a:r>
-              <a:t>Users interact with agent output in the apps they already use daily</a:t>
+              <a:t>Trigger a blocked action — agent attempts to share externally</a:t>
             </a:r>
           </a:p>
           <a:p>
@@ -19510,7 +19643,7 @@
               <a:buChar char="•"/>
             </a:pPr>
             <a:r>
-              <a:t>Competing solutions require browser extensions, sidebars, or standalone agent portals</a:t>
+              <a:t>Observe real-time enforcement and audit trail for both actions</a:t>
             </a:r>
           </a:p>
         </p:txBody>
@@ -19773,7 +19906,7 @@
     <p:bg>
       <p:bgPr>
         <a:solidFill>
-          <a:srgbClr val="002050"/>
+          <a:srgbClr val="FFFFFF"/>
         </a:solidFill>
         <a:effectLst/>
       </p:bgPr>
@@ -19793,8 +19926,8 @@
         </p:nvSpPr>
         <p:spPr>
           <a:xfrm>
-            <a:off x="0" y="0"/>
-            <a:ext cx="228600" cy="6858000"/>
+            <a:off x="457200" y="457200"/>
+            <a:ext cx="109220" cy="508000"/>
           </a:xfrm>
           <a:prstGeom prst="rect">
             <a:avLst/>
@@ -19830,14 +19963,178 @@
       </p:sp>
       <p:sp>
         <p:nvSpPr>
-          <p:cNvPr id="3" name="Rectangle 2"/>
+          <p:cNvPr id="3" name="TextBox 2"/>
+          <p:cNvSpPr txBox="1"/>
+          <p:nvPr/>
+        </p:nvSpPr>
+        <p:spPr>
+          <a:xfrm>
+            <a:off x="658368" y="365760"/>
+            <a:ext cx="10515600" cy="640080"/>
+          </a:xfrm>
+          <a:prstGeom prst="rect">
+            <a:avLst/>
+          </a:prstGeom>
+          <a:noFill/>
+        </p:spPr>
+        <p:txBody>
+          <a:bodyPr wrap="square" anchor="ctr">
+            <a:spAutoFit/>
+          </a:bodyPr>
+          <a:lstStyle/>
+          <a:p>
+            <a:pPr algn="l">
+              <a:defRPr sz="2600" b="0">
+                <a:solidFill>
+                  <a:srgbClr val="000000"/>
+                </a:solidFill>
+                <a:latin typeface="Segoe UI Semibold"/>
+              </a:defRPr>
+            </a:pPr>
+            <a:r>
+              <a:t>How We Measure Success for Productivity Integration</a:t>
+            </a:r>
+          </a:p>
+        </p:txBody>
+      </p:sp>
+      <p:sp>
+        <p:nvSpPr>
+          <p:cNvPr id="4" name="TextBox 3"/>
+          <p:cNvSpPr txBox="1"/>
+          <p:nvPr/>
+        </p:nvSpPr>
+        <p:spPr>
+          <a:xfrm>
+            <a:off x="658368" y="1280160"/>
+            <a:ext cx="10515600" cy="4572000"/>
+          </a:xfrm>
+          <a:prstGeom prst="rect">
+            <a:avLst/>
+          </a:prstGeom>
+          <a:noFill/>
+        </p:spPr>
+        <p:txBody>
+          <a:bodyPr wrap="square">
+            <a:spAutoFit/>
+          </a:bodyPr>
+          <a:lstStyle/>
+          <a:p>
+            <a:pPr marL="228600" indent="-228600">
+              <a:spcBef>
+                <a:spcPts val="400"/>
+              </a:spcBef>
+              <a:spcAft>
+                <a:spcPts val="1000"/>
+              </a:spcAft>
+              <a:defRPr sz="1400">
+                <a:solidFill>
+                  <a:srgbClr val="000000"/>
+                </a:solidFill>
+                <a:latin typeface="Segoe UI Semibold"/>
+              </a:defRPr>
+              <a:buFont typeface="Arial"/>
+              <a:buChar char="•"/>
+            </a:pPr>
+            <a:r>
+              <a:t>Agent successfully operates within allowed boundaries in Outlook, Teams, Word, and/or SharePoint</a:t>
+            </a:r>
+          </a:p>
+          <a:p>
+            <a:pPr marL="228600" indent="-228600">
+              <a:spcBef>
+                <a:spcPts val="400"/>
+              </a:spcBef>
+              <a:spcAft>
+                <a:spcPts val="1000"/>
+              </a:spcAft>
+              <a:defRPr sz="1400">
+                <a:solidFill>
+                  <a:srgbClr val="000000"/>
+                </a:solidFill>
+                <a:latin typeface="Segoe UI Semibold"/>
+              </a:defRPr>
+              <a:buFont typeface="Arial"/>
+              <a:buChar char="•"/>
+            </a:pPr>
+            <a:r>
+              <a:t>Blocked actions are denied in real time (sub-second enforcement)</a:t>
+            </a:r>
+          </a:p>
+          <a:p>
+            <a:pPr marL="228600" indent="-228600">
+              <a:spcBef>
+                <a:spcPts val="400"/>
+              </a:spcBef>
+              <a:spcAft>
+                <a:spcPts val="1000"/>
+              </a:spcAft>
+              <a:defRPr sz="1400">
+                <a:solidFill>
+                  <a:srgbClr val="000000"/>
+                </a:solidFill>
+                <a:latin typeface="Segoe UI Semibold"/>
+              </a:defRPr>
+              <a:buFont typeface="Arial"/>
+              <a:buChar char="•"/>
+            </a:pPr>
+            <a:r>
+              <a:t>Allow/block policies can be changed and take effect without redeploying the agent</a:t>
+            </a:r>
+          </a:p>
+          <a:p>
+            <a:pPr marL="228600" indent="-228600">
+              <a:spcBef>
+                <a:spcPts val="400"/>
+              </a:spcBef>
+              <a:spcAft>
+                <a:spcPts val="1000"/>
+              </a:spcAft>
+              <a:defRPr sz="1400">
+                <a:solidFill>
+                  <a:srgbClr val="000000"/>
+                </a:solidFill>
+                <a:latin typeface="Segoe UI Semibold"/>
+              </a:defRPr>
+              <a:buFont typeface="Arial"/>
+              <a:buChar char="•"/>
+            </a:pPr>
+            <a:r>
+              <a:t>Audit trail captures both allowed and blocked actions with full context</a:t>
+            </a:r>
+          </a:p>
+          <a:p>
+            <a:pPr marL="228600" indent="-228600">
+              <a:spcBef>
+                <a:spcPts val="400"/>
+              </a:spcBef>
+              <a:spcAft>
+                <a:spcPts val="1000"/>
+              </a:spcAft>
+              <a:defRPr sz="1400">
+                <a:solidFill>
+                  <a:srgbClr val="000000"/>
+                </a:solidFill>
+                <a:latin typeface="Segoe UI Semibold"/>
+              </a:defRPr>
+              <a:buFont typeface="Arial"/>
+              <a:buChar char="•"/>
+            </a:pPr>
+            <a:r>
+              <a:t>End users experience no disruption — governance is invisible to them</a:t>
+            </a:r>
+          </a:p>
+        </p:txBody>
+      </p:sp>
+      <p:sp>
+        <p:nvSpPr>
+          <p:cNvPr id="5" name="Rectangle 4"/>
           <p:cNvSpPr/>
           <p:nvPr/>
         </p:nvSpPr>
         <p:spPr>
           <a:xfrm>
-            <a:off x="10972800" y="274320"/>
-            <a:ext cx="165100" cy="165100"/>
+            <a:off x="365760" y="6400800"/>
+            <a:ext cx="63500" cy="63500"/>
           </a:xfrm>
           <a:prstGeom prst="rect">
             <a:avLst/>
@@ -19873,14 +20170,14 @@
       </p:sp>
       <p:sp>
         <p:nvSpPr>
-          <p:cNvPr id="4" name="Rectangle 3"/>
+          <p:cNvPr id="6" name="Rectangle 5"/>
           <p:cNvSpPr/>
           <p:nvPr/>
         </p:nvSpPr>
         <p:spPr>
           <a:xfrm>
-            <a:off x="11156950" y="274320"/>
-            <a:ext cx="165100" cy="165100"/>
+            <a:off x="448310" y="6400800"/>
+            <a:ext cx="63500" cy="63500"/>
           </a:xfrm>
           <a:prstGeom prst="rect">
             <a:avLst/>
@@ -19916,14 +20213,14 @@
       </p:sp>
       <p:sp>
         <p:nvSpPr>
-          <p:cNvPr id="5" name="Rectangle 4"/>
+          <p:cNvPr id="7" name="Rectangle 6"/>
           <p:cNvSpPr/>
           <p:nvPr/>
         </p:nvSpPr>
         <p:spPr>
           <a:xfrm>
-            <a:off x="10972800" y="458470"/>
-            <a:ext cx="165100" cy="165100"/>
+            <a:off x="365760" y="6483350"/>
+            <a:ext cx="63500" cy="63500"/>
           </a:xfrm>
           <a:prstGeom prst="rect">
             <a:avLst/>
@@ -19959,14 +20256,14 @@
       </p:sp>
       <p:sp>
         <p:nvSpPr>
-          <p:cNvPr id="6" name="Rectangle 5"/>
+          <p:cNvPr id="8" name="Rectangle 7"/>
           <p:cNvSpPr/>
           <p:nvPr/>
         </p:nvSpPr>
         <p:spPr>
           <a:xfrm>
-            <a:off x="11156950" y="458470"/>
-            <a:ext cx="165100" cy="165100"/>
+            <a:off x="448310" y="6483350"/>
+            <a:ext cx="63500" cy="63500"/>
           </a:xfrm>
           <a:prstGeom prst="rect">
             <a:avLst/>
@@ -20002,14 +20299,14 @@
       </p:sp>
       <p:sp>
         <p:nvSpPr>
-          <p:cNvPr id="7" name="TextBox 6"/>
+          <p:cNvPr id="9" name="TextBox 8"/>
           <p:cNvSpPr txBox="1"/>
           <p:nvPr/>
         </p:nvSpPr>
         <p:spPr>
           <a:xfrm>
-            <a:off x="731520" y="457200"/>
-            <a:ext cx="5486400" cy="5029200"/>
+            <a:off x="594360" y="6291072"/>
+            <a:ext cx="1371600" cy="274320"/>
           </a:xfrm>
           <a:prstGeom prst="rect">
             <a:avLst/>
@@ -20023,29 +20320,29 @@
           <a:lstStyle/>
           <a:p>
             <a:pPr algn="l">
-              <a:defRPr sz="38000" b="0">
-                <a:solidFill>
-                  <a:srgbClr val="003A70"/>
-                </a:solidFill>
-                <a:latin typeface="Segoe UI Light"/>
-              </a:defRPr>
-            </a:pPr>
-            <a:r>
-              <a:t>7</a:t>
-            </a:r>
-          </a:p>
-        </p:txBody>
-      </p:sp>
-      <p:sp>
-        <p:nvSpPr>
-          <p:cNvPr id="8" name="TextBox 7"/>
+              <a:defRPr sz="1100">
+                <a:solidFill>
+                  <a:srgbClr val="000000"/>
+                </a:solidFill>
+                <a:latin typeface="Segoe UI"/>
+              </a:defRPr>
+            </a:pPr>
+            <a:r>
+              <a:t>Microsoft</a:t>
+            </a:r>
+          </a:p>
+        </p:txBody>
+      </p:sp>
+      <p:sp>
+        <p:nvSpPr>
+          <p:cNvPr id="10" name="TextBox 9"/>
           <p:cNvSpPr txBox="1"/>
           <p:nvPr/>
         </p:nvSpPr>
         <p:spPr>
           <a:xfrm>
-            <a:off x="914400" y="3200400"/>
-            <a:ext cx="9144000" cy="1097280"/>
+            <a:off x="7772400" y="6291072"/>
+            <a:ext cx="4114800" cy="274320"/>
           </a:xfrm>
           <a:prstGeom prst="rect">
             <a:avLst/>
@@ -20053,37 +20350,21 @@
           <a:noFill/>
         </p:spPr>
         <p:txBody>
-          <a:bodyPr wrap="square" anchor="ctr">
+          <a:bodyPr wrap="none">
             <a:spAutoFit/>
           </a:bodyPr>
           <a:lstStyle/>
           <a:p>
-            <a:pPr algn="l">
-              <a:defRPr sz="5600" b="0">
-                <a:solidFill>
-                  <a:srgbClr val="FFFFFF"/>
-                </a:solidFill>
-                <a:latin typeface="Segoe UI Light"/>
-              </a:defRPr>
-            </a:pPr>
-            <a:r>
-              <a:t>Summary &amp; Next Steps</a:t>
-            </a:r>
-          </a:p>
-          <a:p>
-            <a:pPr algn="l">
-              <a:spcBef>
-                <a:spcPts val="800"/>
-              </a:spcBef>
-              <a:defRPr sz="2200">
-                <a:solidFill>
-                  <a:srgbClr val="50E6FF"/>
+            <a:pPr algn="r">
+              <a:defRPr sz="1000">
+                <a:solidFill>
+                  <a:srgbClr val="000000"/>
                 </a:solidFill>
                 <a:latin typeface="Segoe UI"/>
               </a:defRPr>
             </a:pPr>
             <a:r>
-              <a:t>From Proof of Value to Production</a:t>
+              <a:t>Agent 365  |  Proof of Value</a:t>
             </a:r>
           </a:p>
         </p:txBody>
@@ -20188,7 +20469,7 @@
               </a:defRPr>
             </a:pPr>
             <a:r>
-              <a:t>What We Proved: Agent Governance That Works Today</a:t>
+              <a:t>Why This Matters: No Separate Agent UI</a:t>
             </a:r>
           </a:p>
         </p:txBody>
@@ -20232,7 +20513,7 @@
               <a:buChar char="•"/>
             </a:pPr>
             <a:r>
-              <a:t>✅ UC1: Every agent discovered and registered — zero shadow agents</a:t>
+              <a:t>Agents operate natively within M365 apps — no separate interface for users to learn</a:t>
             </a:r>
           </a:p>
           <a:p>
@@ -20253,7 +20534,7 @@
               <a:buChar char="•"/>
             </a:pPr>
             <a:r>
-              <a:t>✅ UC2: Dedicated identity with least-privilege — same fabric as employees</a:t>
+              <a:t>Governance is platform-level — not a per-app plug-in that can be bypassed</a:t>
             </a:r>
           </a:p>
           <a:p>
@@ -20274,7 +20555,7 @@
               <a:buChar char="•"/>
             </a:pPr>
             <a:r>
-              <a:t>✅ UC3: DLP and sensitivity labels enforced — same policies as users</a:t>
+              <a:t>Allow/block enforcement is real-time and centrally managed</a:t>
             </a:r>
           </a:p>
           <a:p>
@@ -20295,7 +20576,7 @@
               <a:buChar char="•"/>
             </a:pPr>
             <a:r>
-              <a:t>✅ UC4: Threat detection and response — agents as first-class Defender assets</a:t>
+              <a:t>Users interact with agent output in the apps they already use daily</a:t>
             </a:r>
           </a:p>
           <a:p>
@@ -20316,28 +20597,7 @@
               <a:buChar char="•"/>
             </a:pPr>
             <a:r>
-              <a:t>✅ UC5: Full audit trail — compliance fabric auditors already trust</a:t>
-            </a:r>
-          </a:p>
-          <a:p>
-            <a:pPr marL="228600" indent="-228600">
-              <a:spcBef>
-                <a:spcPts val="400"/>
-              </a:spcBef>
-              <a:spcAft>
-                <a:spcPts val="1000"/>
-              </a:spcAft>
-              <a:defRPr sz="1400">
-                <a:solidFill>
-                  <a:srgbClr val="000000"/>
-                </a:solidFill>
-                <a:latin typeface="Segoe UI Semibold"/>
-              </a:defRPr>
-              <a:buFont typeface="Arial"/>
-              <a:buChar char="•"/>
-            </a:pPr>
-            <a:r>
-              <a:t>✅ UC6: Governed productivity integration — real-time allow/block, no plug-ins</a:t>
+              <a:t>Competing solutions require browser extensions, sidebars, or standalone agent portals</a:t>
             </a:r>
           </a:p>
         </p:txBody>
@@ -20600,7 +20860,7 @@
     <p:bg>
       <p:bgPr>
         <a:solidFill>
-          <a:srgbClr val="FFFFFF"/>
+          <a:srgbClr val="002050"/>
         </a:solidFill>
         <a:effectLst/>
       </p:bgPr>
@@ -20620,8 +20880,8 @@
         </p:nvSpPr>
         <p:spPr>
           <a:xfrm>
-            <a:off x="457200" y="457200"/>
-            <a:ext cx="109220" cy="508000"/>
+            <a:off x="0" y="0"/>
+            <a:ext cx="228600" cy="6858000"/>
           </a:xfrm>
           <a:prstGeom prst="rect">
             <a:avLst/>
@@ -20657,178 +20917,14 @@
       </p:sp>
       <p:sp>
         <p:nvSpPr>
-          <p:cNvPr id="3" name="TextBox 2"/>
-          <p:cNvSpPr txBox="1"/>
-          <p:nvPr/>
-        </p:nvSpPr>
-        <p:spPr>
-          <a:xfrm>
-            <a:off x="658368" y="365760"/>
-            <a:ext cx="10515600" cy="640080"/>
-          </a:xfrm>
-          <a:prstGeom prst="rect">
-            <a:avLst/>
-          </a:prstGeom>
-          <a:noFill/>
-        </p:spPr>
-        <p:txBody>
-          <a:bodyPr wrap="square" anchor="ctr">
-            <a:spAutoFit/>
-          </a:bodyPr>
-          <a:lstStyle/>
-          <a:p>
-            <a:pPr algn="l">
-              <a:defRPr sz="2600" b="0">
-                <a:solidFill>
-                  <a:srgbClr val="000000"/>
-                </a:solidFill>
-                <a:latin typeface="Segoe UI Semibold"/>
-              </a:defRPr>
-            </a:pPr>
-            <a:r>
-              <a:t>Broader Rollout: Extending Agent Governance Across Your Organization</a:t>
-            </a:r>
-          </a:p>
-        </p:txBody>
-      </p:sp>
-      <p:sp>
-        <p:nvSpPr>
-          <p:cNvPr id="4" name="TextBox 3"/>
-          <p:cNvSpPr txBox="1"/>
-          <p:nvPr/>
-        </p:nvSpPr>
-        <p:spPr>
-          <a:xfrm>
-            <a:off x="658368" y="1280160"/>
-            <a:ext cx="10515600" cy="4572000"/>
-          </a:xfrm>
-          <a:prstGeom prst="rect">
-            <a:avLst/>
-          </a:prstGeom>
-          <a:noFill/>
-        </p:spPr>
-        <p:txBody>
-          <a:bodyPr wrap="square">
-            <a:spAutoFit/>
-          </a:bodyPr>
-          <a:lstStyle/>
-          <a:p>
-            <a:pPr marL="228600" indent="-228600">
-              <a:spcBef>
-                <a:spcPts val="400"/>
-              </a:spcBef>
-              <a:spcAft>
-                <a:spcPts val="1000"/>
-              </a:spcAft>
-              <a:defRPr sz="1400">
-                <a:solidFill>
-                  <a:srgbClr val="000000"/>
-                </a:solidFill>
-                <a:latin typeface="Segoe UI Semibold"/>
-              </a:defRPr>
-              <a:buFont typeface="Arial"/>
-              <a:buChar char="•"/>
-            </a:pPr>
-            <a:r>
-              <a:t>Expand from 3+ PoV agents to full agent estate</a:t>
-            </a:r>
-          </a:p>
-          <a:p>
-            <a:pPr marL="228600" indent="-228600">
-              <a:spcBef>
-                <a:spcPts val="400"/>
-              </a:spcBef>
-              <a:spcAft>
-                <a:spcPts val="1000"/>
-              </a:spcAft>
-              <a:defRPr sz="1400">
-                <a:solidFill>
-                  <a:srgbClr val="000000"/>
-                </a:solidFill>
-                <a:latin typeface="Segoe UI Semibold"/>
-              </a:defRPr>
-              <a:buFont typeface="Arial"/>
-              <a:buChar char="•"/>
-            </a:pPr>
-            <a:r>
-              <a:t>Integrate agent governance into existing change management processes</a:t>
-            </a:r>
-          </a:p>
-          <a:p>
-            <a:pPr marL="228600" indent="-228600">
-              <a:spcBef>
-                <a:spcPts val="400"/>
-              </a:spcBef>
-              <a:spcAft>
-                <a:spcPts val="1000"/>
-              </a:spcAft>
-              <a:defRPr sz="1400">
-                <a:solidFill>
-                  <a:srgbClr val="000000"/>
-                </a:solidFill>
-                <a:latin typeface="Segoe UI Semibold"/>
-              </a:defRPr>
-              <a:buFont typeface="Arial"/>
-              <a:buChar char="•"/>
-            </a:pPr>
-            <a:r>
-              <a:t>Align agent lifecycle policies with your compliance calendar</a:t>
-            </a:r>
-          </a:p>
-          <a:p>
-            <a:pPr marL="228600" indent="-228600">
-              <a:spcBef>
-                <a:spcPts val="400"/>
-              </a:spcBef>
-              <a:spcAft>
-                <a:spcPts val="1000"/>
-              </a:spcAft>
-              <a:defRPr sz="1400">
-                <a:solidFill>
-                  <a:srgbClr val="000000"/>
-                </a:solidFill>
-                <a:latin typeface="Segoe UI Semibold"/>
-              </a:defRPr>
-              <a:buFont typeface="Arial"/>
-              <a:buChar char="•"/>
-            </a:pPr>
-            <a:r>
-              <a:t>Enable self-service agent registration with guardrails for development teams</a:t>
-            </a:r>
-          </a:p>
-          <a:p>
-            <a:pPr marL="228600" indent="-228600">
-              <a:spcBef>
-                <a:spcPts val="400"/>
-              </a:spcBef>
-              <a:spcAft>
-                <a:spcPts val="1000"/>
-              </a:spcAft>
-              <a:defRPr sz="1400">
-                <a:solidFill>
-                  <a:srgbClr val="000000"/>
-                </a:solidFill>
-                <a:latin typeface="Segoe UI Semibold"/>
-              </a:defRPr>
-              <a:buFont typeface="Arial"/>
-              <a:buChar char="•"/>
-            </a:pPr>
-            <a:r>
-              <a:t>Establish ongoing monitoring cadence with SOC team</a:t>
-            </a:r>
-          </a:p>
-        </p:txBody>
-      </p:sp>
-      <p:sp>
-        <p:nvSpPr>
-          <p:cNvPr id="5" name="Rectangle 4"/>
+          <p:cNvPr id="3" name="Rectangle 2"/>
           <p:cNvSpPr/>
           <p:nvPr/>
         </p:nvSpPr>
         <p:spPr>
           <a:xfrm>
-            <a:off x="365760" y="6400800"/>
-            <a:ext cx="63500" cy="63500"/>
+            <a:off x="10972800" y="274320"/>
+            <a:ext cx="165100" cy="165100"/>
           </a:xfrm>
           <a:prstGeom prst="rect">
             <a:avLst/>
@@ -20864,14 +20960,14 @@
       </p:sp>
       <p:sp>
         <p:nvSpPr>
-          <p:cNvPr id="6" name="Rectangle 5"/>
+          <p:cNvPr id="4" name="Rectangle 3"/>
           <p:cNvSpPr/>
           <p:nvPr/>
         </p:nvSpPr>
         <p:spPr>
           <a:xfrm>
-            <a:off x="448310" y="6400800"/>
-            <a:ext cx="63500" cy="63500"/>
+            <a:off x="11156950" y="274320"/>
+            <a:ext cx="165100" cy="165100"/>
           </a:xfrm>
           <a:prstGeom prst="rect">
             <a:avLst/>
@@ -20907,14 +21003,14 @@
       </p:sp>
       <p:sp>
         <p:nvSpPr>
-          <p:cNvPr id="7" name="Rectangle 6"/>
+          <p:cNvPr id="5" name="Rectangle 4"/>
           <p:cNvSpPr/>
           <p:nvPr/>
         </p:nvSpPr>
         <p:spPr>
           <a:xfrm>
-            <a:off x="365760" y="6483350"/>
-            <a:ext cx="63500" cy="63500"/>
+            <a:off x="10972800" y="458470"/>
+            <a:ext cx="165100" cy="165100"/>
           </a:xfrm>
           <a:prstGeom prst="rect">
             <a:avLst/>
@@ -20950,14 +21046,14 @@
       </p:sp>
       <p:sp>
         <p:nvSpPr>
-          <p:cNvPr id="8" name="Rectangle 7"/>
+          <p:cNvPr id="6" name="Rectangle 5"/>
           <p:cNvSpPr/>
           <p:nvPr/>
         </p:nvSpPr>
         <p:spPr>
           <a:xfrm>
-            <a:off x="448310" y="6483350"/>
-            <a:ext cx="63500" cy="63500"/>
+            <a:off x="11156950" y="458470"/>
+            <a:ext cx="165100" cy="165100"/>
           </a:xfrm>
           <a:prstGeom prst="rect">
             <a:avLst/>
@@ -20993,14 +21089,14 @@
       </p:sp>
       <p:sp>
         <p:nvSpPr>
-          <p:cNvPr id="9" name="TextBox 8"/>
+          <p:cNvPr id="7" name="TextBox 6"/>
           <p:cNvSpPr txBox="1"/>
           <p:nvPr/>
         </p:nvSpPr>
         <p:spPr>
           <a:xfrm>
-            <a:off x="594360" y="6291072"/>
-            <a:ext cx="1371600" cy="274320"/>
+            <a:off x="731520" y="457200"/>
+            <a:ext cx="5486400" cy="5029200"/>
           </a:xfrm>
           <a:prstGeom prst="rect">
             <a:avLst/>
@@ -21014,29 +21110,29 @@
           <a:lstStyle/>
           <a:p>
             <a:pPr algn="l">
-              <a:defRPr sz="1100">
-                <a:solidFill>
-                  <a:srgbClr val="000000"/>
-                </a:solidFill>
-                <a:latin typeface="Segoe UI"/>
-              </a:defRPr>
-            </a:pPr>
-            <a:r>
-              <a:t>Microsoft</a:t>
-            </a:r>
-          </a:p>
-        </p:txBody>
-      </p:sp>
-      <p:sp>
-        <p:nvSpPr>
-          <p:cNvPr id="10" name="TextBox 9"/>
+              <a:defRPr sz="38000" b="0">
+                <a:solidFill>
+                  <a:srgbClr val="003A70"/>
+                </a:solidFill>
+                <a:latin typeface="Segoe UI Light"/>
+              </a:defRPr>
+            </a:pPr>
+            <a:r>
+              <a:t>7</a:t>
+            </a:r>
+          </a:p>
+        </p:txBody>
+      </p:sp>
+      <p:sp>
+        <p:nvSpPr>
+          <p:cNvPr id="8" name="TextBox 7"/>
           <p:cNvSpPr txBox="1"/>
           <p:nvPr/>
         </p:nvSpPr>
         <p:spPr>
           <a:xfrm>
-            <a:off x="7772400" y="6291072"/>
-            <a:ext cx="4114800" cy="274320"/>
+            <a:off x="914400" y="3200400"/>
+            <a:ext cx="9144000" cy="1097280"/>
           </a:xfrm>
           <a:prstGeom prst="rect">
             <a:avLst/>
@@ -21044,21 +21140,37 @@
           <a:noFill/>
         </p:spPr>
         <p:txBody>
-          <a:bodyPr wrap="none">
+          <a:bodyPr wrap="square" anchor="ctr">
             <a:spAutoFit/>
           </a:bodyPr>
           <a:lstStyle/>
           <a:p>
-            <a:pPr algn="r">
-              <a:defRPr sz="1000">
-                <a:solidFill>
-                  <a:srgbClr val="000000"/>
+            <a:pPr algn="l">
+              <a:defRPr sz="5600" b="0">
+                <a:solidFill>
+                  <a:srgbClr val="FFFFFF"/>
+                </a:solidFill>
+                <a:latin typeface="Segoe UI Light"/>
+              </a:defRPr>
+            </a:pPr>
+            <a:r>
+              <a:t>Summary &amp; Next Steps</a:t>
+            </a:r>
+          </a:p>
+          <a:p>
+            <a:pPr algn="l">
+              <a:spcBef>
+                <a:spcPts val="800"/>
+              </a:spcBef>
+              <a:defRPr sz="2200">
+                <a:solidFill>
+                  <a:srgbClr val="50E6FF"/>
                 </a:solidFill>
                 <a:latin typeface="Segoe UI"/>
               </a:defRPr>
             </a:pPr>
             <a:r>
-              <a:t>Agent 365  |  Proof of Value</a:t>
+              <a:t>From Proof of Value to Production</a:t>
             </a:r>
           </a:p>
         </p:txBody>
@@ -21640,7 +21752,7 @@
               </a:defRPr>
             </a:pPr>
             <a:r>
-              <a:t>Let's Keep the Conversation Going</a:t>
+              <a:t>What We Proved: Agent Governance That Works Today</a:t>
             </a:r>
           </a:p>
         </p:txBody>
@@ -21684,7 +21796,7 @@
               <a:buChar char="•"/>
             </a:pPr>
             <a:r>
-              <a:t>Your Microsoft account team: [Account Team Contacts]</a:t>
+              <a:t>✅ UC1: Every agent discovered and registered — zero shadow agents</a:t>
             </a:r>
           </a:p>
           <a:p>
@@ -21705,7 +21817,7 @@
               <a:buChar char="•"/>
             </a:pPr>
             <a:r>
-              <a:t>Agent 365 documentation: [Link to docs]</a:t>
+              <a:t>✅ UC2: Dedicated identity with least-privilege — same fabric as employees</a:t>
             </a:r>
           </a:p>
           <a:p>
@@ -21726,7 +21838,7 @@
               <a:buChar char="•"/>
             </a:pPr>
             <a:r>
-              <a:t>PoV completion report: [Will be delivered at engagement close]</a:t>
+              <a:t>✅ UC3: DLP and sensitivity labels enforced — same policies as users</a:t>
             </a:r>
           </a:p>
           <a:p>
@@ -21747,7 +21859,7 @@
               <a:buChar char="•"/>
             </a:pPr>
             <a:r>
-              <a:t>FastTrack support for production deployment: [Link/contact]</a:t>
+              <a:t>✅ UC4: Threat detection and response — agents as first-class Defender assets</a:t>
             </a:r>
           </a:p>
           <a:p>
@@ -21768,7 +21880,28 @@
               <a:buChar char="•"/>
             </a:pPr>
             <a:r>
-              <a:t>Community and feedback: [Tech Community link]</a:t>
+              <a:t>✅ UC5: Full audit trail — compliance fabric auditors already trust</a:t>
+            </a:r>
+          </a:p>
+          <a:p>
+            <a:pPr marL="228600" indent="-228600">
+              <a:spcBef>
+                <a:spcPts val="400"/>
+              </a:spcBef>
+              <a:spcAft>
+                <a:spcPts val="1000"/>
+              </a:spcAft>
+              <a:defRPr sz="1400">
+                <a:solidFill>
+                  <a:srgbClr val="000000"/>
+                </a:solidFill>
+                <a:latin typeface="Segoe UI Semibold"/>
+              </a:defRPr>
+              <a:buFont typeface="Arial"/>
+              <a:buChar char="•"/>
+            </a:pPr>
+            <a:r>
+              <a:t>✅ UC6: Governed productivity integration — real-time allow/block, no plug-ins</a:t>
             </a:r>
           </a:p>
         </p:txBody>
@@ -22031,7 +22164,7 @@
     <p:bg>
       <p:bgPr>
         <a:solidFill>
-          <a:srgbClr val="002050"/>
+          <a:srgbClr val="FFFFFF"/>
         </a:solidFill>
         <a:effectLst/>
       </p:bgPr>
@@ -22051,8 +22184,8 @@
         </p:nvSpPr>
         <p:spPr>
           <a:xfrm>
-            <a:off x="0" y="0"/>
-            <a:ext cx="228600" cy="6858000"/>
+            <a:off x="457200" y="457200"/>
+            <a:ext cx="109220" cy="508000"/>
           </a:xfrm>
           <a:prstGeom prst="rect">
             <a:avLst/>
@@ -22088,14 +22221,178 @@
       </p:sp>
       <p:sp>
         <p:nvSpPr>
-          <p:cNvPr id="3" name="Rectangle 2"/>
+          <p:cNvPr id="3" name="TextBox 2"/>
+          <p:cNvSpPr txBox="1"/>
+          <p:nvPr/>
+        </p:nvSpPr>
+        <p:spPr>
+          <a:xfrm>
+            <a:off x="658368" y="365760"/>
+            <a:ext cx="10515600" cy="640080"/>
+          </a:xfrm>
+          <a:prstGeom prst="rect">
+            <a:avLst/>
+          </a:prstGeom>
+          <a:noFill/>
+        </p:spPr>
+        <p:txBody>
+          <a:bodyPr wrap="square" anchor="ctr">
+            <a:spAutoFit/>
+          </a:bodyPr>
+          <a:lstStyle/>
+          <a:p>
+            <a:pPr algn="l">
+              <a:defRPr sz="2600" b="0">
+                <a:solidFill>
+                  <a:srgbClr val="000000"/>
+                </a:solidFill>
+                <a:latin typeface="Segoe UI Semibold"/>
+              </a:defRPr>
+            </a:pPr>
+            <a:r>
+              <a:t>Broader Rollout: Extending Agent Governance Across Your Organization</a:t>
+            </a:r>
+          </a:p>
+        </p:txBody>
+      </p:sp>
+      <p:sp>
+        <p:nvSpPr>
+          <p:cNvPr id="4" name="TextBox 3"/>
+          <p:cNvSpPr txBox="1"/>
+          <p:nvPr/>
+        </p:nvSpPr>
+        <p:spPr>
+          <a:xfrm>
+            <a:off x="658368" y="1280160"/>
+            <a:ext cx="10515600" cy="4572000"/>
+          </a:xfrm>
+          <a:prstGeom prst="rect">
+            <a:avLst/>
+          </a:prstGeom>
+          <a:noFill/>
+        </p:spPr>
+        <p:txBody>
+          <a:bodyPr wrap="square">
+            <a:spAutoFit/>
+          </a:bodyPr>
+          <a:lstStyle/>
+          <a:p>
+            <a:pPr marL="228600" indent="-228600">
+              <a:spcBef>
+                <a:spcPts val="400"/>
+              </a:spcBef>
+              <a:spcAft>
+                <a:spcPts val="1000"/>
+              </a:spcAft>
+              <a:defRPr sz="1400">
+                <a:solidFill>
+                  <a:srgbClr val="000000"/>
+                </a:solidFill>
+                <a:latin typeface="Segoe UI Semibold"/>
+              </a:defRPr>
+              <a:buFont typeface="Arial"/>
+              <a:buChar char="•"/>
+            </a:pPr>
+            <a:r>
+              <a:t>Expand from 3+ PoV agents to full agent estate</a:t>
+            </a:r>
+          </a:p>
+          <a:p>
+            <a:pPr marL="228600" indent="-228600">
+              <a:spcBef>
+                <a:spcPts val="400"/>
+              </a:spcBef>
+              <a:spcAft>
+                <a:spcPts val="1000"/>
+              </a:spcAft>
+              <a:defRPr sz="1400">
+                <a:solidFill>
+                  <a:srgbClr val="000000"/>
+                </a:solidFill>
+                <a:latin typeface="Segoe UI Semibold"/>
+              </a:defRPr>
+              <a:buFont typeface="Arial"/>
+              <a:buChar char="•"/>
+            </a:pPr>
+            <a:r>
+              <a:t>Integrate agent governance into existing change management processes</a:t>
+            </a:r>
+          </a:p>
+          <a:p>
+            <a:pPr marL="228600" indent="-228600">
+              <a:spcBef>
+                <a:spcPts val="400"/>
+              </a:spcBef>
+              <a:spcAft>
+                <a:spcPts val="1000"/>
+              </a:spcAft>
+              <a:defRPr sz="1400">
+                <a:solidFill>
+                  <a:srgbClr val="000000"/>
+                </a:solidFill>
+                <a:latin typeface="Segoe UI Semibold"/>
+              </a:defRPr>
+              <a:buFont typeface="Arial"/>
+              <a:buChar char="•"/>
+            </a:pPr>
+            <a:r>
+              <a:t>Align agent lifecycle policies with your compliance calendar</a:t>
+            </a:r>
+          </a:p>
+          <a:p>
+            <a:pPr marL="228600" indent="-228600">
+              <a:spcBef>
+                <a:spcPts val="400"/>
+              </a:spcBef>
+              <a:spcAft>
+                <a:spcPts val="1000"/>
+              </a:spcAft>
+              <a:defRPr sz="1400">
+                <a:solidFill>
+                  <a:srgbClr val="000000"/>
+                </a:solidFill>
+                <a:latin typeface="Segoe UI Semibold"/>
+              </a:defRPr>
+              <a:buFont typeface="Arial"/>
+              <a:buChar char="•"/>
+            </a:pPr>
+            <a:r>
+              <a:t>Enable self-service agent registration with guardrails for development teams</a:t>
+            </a:r>
+          </a:p>
+          <a:p>
+            <a:pPr marL="228600" indent="-228600">
+              <a:spcBef>
+                <a:spcPts val="400"/>
+              </a:spcBef>
+              <a:spcAft>
+                <a:spcPts val="1000"/>
+              </a:spcAft>
+              <a:defRPr sz="1400">
+                <a:solidFill>
+                  <a:srgbClr val="000000"/>
+                </a:solidFill>
+                <a:latin typeface="Segoe UI Semibold"/>
+              </a:defRPr>
+              <a:buFont typeface="Arial"/>
+              <a:buChar char="•"/>
+            </a:pPr>
+            <a:r>
+              <a:t>Establish ongoing monitoring cadence with SOC team</a:t>
+            </a:r>
+          </a:p>
+        </p:txBody>
+      </p:sp>
+      <p:sp>
+        <p:nvSpPr>
+          <p:cNvPr id="5" name="Rectangle 4"/>
           <p:cNvSpPr/>
           <p:nvPr/>
         </p:nvSpPr>
         <p:spPr>
           <a:xfrm>
-            <a:off x="10972800" y="274320"/>
-            <a:ext cx="165100" cy="165100"/>
+            <a:off x="365760" y="6400800"/>
+            <a:ext cx="63500" cy="63500"/>
           </a:xfrm>
           <a:prstGeom prst="rect">
             <a:avLst/>
@@ -22131,14 +22428,14 @@
       </p:sp>
       <p:sp>
         <p:nvSpPr>
-          <p:cNvPr id="4" name="Rectangle 3"/>
+          <p:cNvPr id="6" name="Rectangle 5"/>
           <p:cNvSpPr/>
           <p:nvPr/>
         </p:nvSpPr>
         <p:spPr>
           <a:xfrm>
-            <a:off x="11156950" y="274320"/>
-            <a:ext cx="165100" cy="165100"/>
+            <a:off x="448310" y="6400800"/>
+            <a:ext cx="63500" cy="63500"/>
           </a:xfrm>
           <a:prstGeom prst="rect">
             <a:avLst/>
@@ -22174,14 +22471,14 @@
       </p:sp>
       <p:sp>
         <p:nvSpPr>
-          <p:cNvPr id="5" name="Rectangle 4"/>
+          <p:cNvPr id="7" name="Rectangle 6"/>
           <p:cNvSpPr/>
           <p:nvPr/>
         </p:nvSpPr>
         <p:spPr>
           <a:xfrm>
-            <a:off x="10972800" y="458470"/>
-            <a:ext cx="165100" cy="165100"/>
+            <a:off x="365760" y="6483350"/>
+            <a:ext cx="63500" cy="63500"/>
           </a:xfrm>
           <a:prstGeom prst="rect">
             <a:avLst/>
@@ -22217,14 +22514,14 @@
       </p:sp>
       <p:sp>
         <p:nvSpPr>
-          <p:cNvPr id="6" name="Rectangle 5"/>
+          <p:cNvPr id="8" name="Rectangle 7"/>
           <p:cNvSpPr/>
           <p:nvPr/>
         </p:nvSpPr>
         <p:spPr>
           <a:xfrm>
-            <a:off x="11156950" y="458470"/>
-            <a:ext cx="165100" cy="165100"/>
+            <a:off x="448310" y="6483350"/>
+            <a:ext cx="63500" cy="63500"/>
           </a:xfrm>
           <a:prstGeom prst="rect">
             <a:avLst/>
@@ -22260,14 +22557,14 @@
       </p:sp>
       <p:sp>
         <p:nvSpPr>
-          <p:cNvPr id="7" name="TextBox 6"/>
+          <p:cNvPr id="9" name="TextBox 8"/>
           <p:cNvSpPr txBox="1"/>
           <p:nvPr/>
         </p:nvSpPr>
         <p:spPr>
           <a:xfrm>
-            <a:off x="731520" y="457200"/>
-            <a:ext cx="5486400" cy="5029200"/>
+            <a:off x="594360" y="6291072"/>
+            <a:ext cx="1371600" cy="274320"/>
           </a:xfrm>
           <a:prstGeom prst="rect">
             <a:avLst/>
@@ -22281,29 +22578,29 @@
           <a:lstStyle/>
           <a:p>
             <a:pPr algn="l">
-              <a:defRPr sz="38000" b="0">
-                <a:solidFill>
-                  <a:srgbClr val="003A70"/>
-                </a:solidFill>
-                <a:latin typeface="Segoe UI Light"/>
-              </a:defRPr>
-            </a:pPr>
-            <a:r>
-              <a:t>8</a:t>
-            </a:r>
-          </a:p>
-        </p:txBody>
-      </p:sp>
-      <p:sp>
-        <p:nvSpPr>
-          <p:cNvPr id="8" name="TextBox 7"/>
+              <a:defRPr sz="1100">
+                <a:solidFill>
+                  <a:srgbClr val="000000"/>
+                </a:solidFill>
+                <a:latin typeface="Segoe UI"/>
+              </a:defRPr>
+            </a:pPr>
+            <a:r>
+              <a:t>Microsoft</a:t>
+            </a:r>
+          </a:p>
+        </p:txBody>
+      </p:sp>
+      <p:sp>
+        <p:nvSpPr>
+          <p:cNvPr id="10" name="TextBox 9"/>
           <p:cNvSpPr txBox="1"/>
           <p:nvPr/>
         </p:nvSpPr>
         <p:spPr>
           <a:xfrm>
-            <a:off x="914400" y="3200400"/>
-            <a:ext cx="9144000" cy="1097280"/>
+            <a:off x="7772400" y="6291072"/>
+            <a:ext cx="4114800" cy="274320"/>
           </a:xfrm>
           <a:prstGeom prst="rect">
             <a:avLst/>
@@ -22311,37 +22608,21 @@
           <a:noFill/>
         </p:spPr>
         <p:txBody>
-          <a:bodyPr wrap="square" anchor="ctr">
+          <a:bodyPr wrap="none">
             <a:spAutoFit/>
           </a:bodyPr>
           <a:lstStyle/>
           <a:p>
-            <a:pPr algn="l">
-              <a:defRPr sz="5600" b="0">
-                <a:solidFill>
-                  <a:srgbClr val="FFFFFF"/>
-                </a:solidFill>
-                <a:latin typeface="Segoe UI Light"/>
-              </a:defRPr>
-            </a:pPr>
-            <a:r>
-              <a:t>Appendix</a:t>
-            </a:r>
-          </a:p>
-          <a:p>
-            <a:pPr algn="l">
-              <a:spcBef>
-                <a:spcPts val="800"/>
-              </a:spcBef>
-              <a:defRPr sz="2200">
-                <a:solidFill>
-                  <a:srgbClr val="50E6FF"/>
+            <a:pPr algn="r">
+              <a:defRPr sz="1000">
+                <a:solidFill>
+                  <a:srgbClr val="000000"/>
                 </a:solidFill>
                 <a:latin typeface="Segoe UI"/>
               </a:defRPr>
             </a:pPr>
             <a:r>
-              <a:t>Reference Materials</a:t>
+              <a:t>Agent 365  |  Proof of Value</a:t>
             </a:r>
           </a:p>
         </p:txBody>
@@ -22446,7 +22727,7 @@
               </a:defRPr>
             </a:pPr>
             <a:r>
-              <a:t>Roles &amp; Responsibilities</a:t>
+              <a:t>Let's Keep the Conversation Going</a:t>
             </a:r>
           </a:p>
         </p:txBody>
@@ -22490,7 +22771,7 @@
               <a:buChar char="•"/>
             </a:pPr>
             <a:r>
-              <a:t>Executive Sponsor — Approves scope, provides access, makes go/no-go decision</a:t>
+              <a:t>Your Microsoft account team: [Account Team Contacts]</a:t>
             </a:r>
           </a:p>
           <a:p>
@@ -22511,7 +22792,7 @@
               <a:buChar char="•"/>
             </a:pPr>
             <a:r>
-              <a:t>IT Admin — Configures M365 Admin Center, manages agent registry</a:t>
+              <a:t>Agent 365 documentation: [Link to docs]</a:t>
             </a:r>
           </a:p>
           <a:p>
@@ -22532,7 +22813,7 @@
               <a:buChar char="•"/>
             </a:pPr>
             <a:r>
-              <a:t>Identity Admin — Manages Entra ID agent identities, conditional access policies</a:t>
+              <a:t>PoV completion report: [Will be delivered at engagement close]</a:t>
             </a:r>
           </a:p>
           <a:p>
@@ -22553,7 +22834,7 @@
               <a:buChar char="•"/>
             </a:pPr>
             <a:r>
-              <a:t>Data Security Lead — Configures Purview DLP, sensitivity labels for agents</a:t>
+              <a:t>FastTrack support for production deployment: [Link/contact]</a:t>
             </a:r>
           </a:p>
           <a:p>
@@ -22574,28 +22855,7 @@
               <a:buChar char="•"/>
             </a:pPr>
             <a:r>
-              <a:t>SOC Analyst — Monitors Defender alerts, investigates agent threats, runs response</a:t>
-            </a:r>
-          </a:p>
-          <a:p>
-            <a:pPr marL="228600" indent="-228600">
-              <a:spcBef>
-                <a:spcPts val="400"/>
-              </a:spcBef>
-              <a:spcAft>
-                <a:spcPts val="1000"/>
-              </a:spcAft>
-              <a:defRPr sz="1400">
-                <a:solidFill>
-                  <a:srgbClr val="000000"/>
-                </a:solidFill>
-                <a:latin typeface="Segoe UI Semibold"/>
-              </a:defRPr>
-              <a:buFont typeface="Arial"/>
-              <a:buChar char="•"/>
-            </a:pPr>
-            <a:r>
-              <a:t>Business Owners — Identify agents for PoV, validate success criteria alignment</a:t>
+              <a:t>Community and feedback: [Tech Community link]</a:t>
             </a:r>
           </a:p>
         </p:txBody>
@@ -22853,6 +23113,335 @@
 </file>
 
 <file path=ppt/slides/slide43.xml><?xml version="1.0" encoding="utf-8"?>
+<p:sld xmlns:a="http://schemas.openxmlformats.org/drawingml/2006/main" xmlns:p="http://schemas.openxmlformats.org/presentationml/2006/main" xmlns:r="http://schemas.openxmlformats.org/officeDocument/2006/relationships">
+  <p:cSld>
+    <p:bg>
+      <p:bgPr>
+        <a:solidFill>
+          <a:srgbClr val="002050"/>
+        </a:solidFill>
+        <a:effectLst/>
+      </p:bgPr>
+    </p:bg>
+    <p:spTree>
+      <p:nvGrpSpPr>
+        <p:cNvPr id="1" name=""/>
+        <p:cNvGrpSpPr/>
+        <p:nvPr/>
+      </p:nvGrpSpPr>
+      <p:grpSpPr/>
+      <p:sp>
+        <p:nvSpPr>
+          <p:cNvPr id="2" name="Rectangle 1"/>
+          <p:cNvSpPr/>
+          <p:nvPr/>
+        </p:nvSpPr>
+        <p:spPr>
+          <a:xfrm>
+            <a:off x="0" y="0"/>
+            <a:ext cx="228600" cy="6858000"/>
+          </a:xfrm>
+          <a:prstGeom prst="rect">
+            <a:avLst/>
+          </a:prstGeom>
+          <a:solidFill>
+            <a:srgbClr val="0078D4"/>
+          </a:solidFill>
+          <a:ln>
+            <a:noFill/>
+          </a:ln>
+        </p:spPr>
+        <p:style>
+          <a:lnRef idx="1">
+            <a:schemeClr val="accent1"/>
+          </a:lnRef>
+          <a:fillRef idx="3">
+            <a:schemeClr val="accent1"/>
+          </a:fillRef>
+          <a:effectRef idx="2">
+            <a:schemeClr val="accent1"/>
+          </a:effectRef>
+          <a:fontRef idx="minor">
+            <a:schemeClr val="lt1"/>
+          </a:fontRef>
+        </p:style>
+        <p:txBody>
+          <a:bodyPr rtlCol="0" anchor="ctr"/>
+          <a:lstStyle/>
+          <a:p>
+            <a:pPr algn="ctr"/>
+          </a:p>
+        </p:txBody>
+      </p:sp>
+      <p:sp>
+        <p:nvSpPr>
+          <p:cNvPr id="3" name="Rectangle 2"/>
+          <p:cNvSpPr/>
+          <p:nvPr/>
+        </p:nvSpPr>
+        <p:spPr>
+          <a:xfrm>
+            <a:off x="10972800" y="274320"/>
+            <a:ext cx="165100" cy="165100"/>
+          </a:xfrm>
+          <a:prstGeom prst="rect">
+            <a:avLst/>
+          </a:prstGeom>
+          <a:solidFill>
+            <a:srgbClr val="F25022"/>
+          </a:solidFill>
+          <a:ln>
+            <a:noFill/>
+          </a:ln>
+        </p:spPr>
+        <p:style>
+          <a:lnRef idx="1">
+            <a:schemeClr val="accent1"/>
+          </a:lnRef>
+          <a:fillRef idx="3">
+            <a:schemeClr val="accent1"/>
+          </a:fillRef>
+          <a:effectRef idx="2">
+            <a:schemeClr val="accent1"/>
+          </a:effectRef>
+          <a:fontRef idx="minor">
+            <a:schemeClr val="lt1"/>
+          </a:fontRef>
+        </p:style>
+        <p:txBody>
+          <a:bodyPr rtlCol="0" anchor="ctr"/>
+          <a:lstStyle/>
+          <a:p>
+            <a:pPr algn="ctr"/>
+          </a:p>
+        </p:txBody>
+      </p:sp>
+      <p:sp>
+        <p:nvSpPr>
+          <p:cNvPr id="4" name="Rectangle 3"/>
+          <p:cNvSpPr/>
+          <p:nvPr/>
+        </p:nvSpPr>
+        <p:spPr>
+          <a:xfrm>
+            <a:off x="11156950" y="274320"/>
+            <a:ext cx="165100" cy="165100"/>
+          </a:xfrm>
+          <a:prstGeom prst="rect">
+            <a:avLst/>
+          </a:prstGeom>
+          <a:solidFill>
+            <a:srgbClr val="7FBA00"/>
+          </a:solidFill>
+          <a:ln>
+            <a:noFill/>
+          </a:ln>
+        </p:spPr>
+        <p:style>
+          <a:lnRef idx="1">
+            <a:schemeClr val="accent1"/>
+          </a:lnRef>
+          <a:fillRef idx="3">
+            <a:schemeClr val="accent1"/>
+          </a:fillRef>
+          <a:effectRef idx="2">
+            <a:schemeClr val="accent1"/>
+          </a:effectRef>
+          <a:fontRef idx="minor">
+            <a:schemeClr val="lt1"/>
+          </a:fontRef>
+        </p:style>
+        <p:txBody>
+          <a:bodyPr rtlCol="0" anchor="ctr"/>
+          <a:lstStyle/>
+          <a:p>
+            <a:pPr algn="ctr"/>
+          </a:p>
+        </p:txBody>
+      </p:sp>
+      <p:sp>
+        <p:nvSpPr>
+          <p:cNvPr id="5" name="Rectangle 4"/>
+          <p:cNvSpPr/>
+          <p:nvPr/>
+        </p:nvSpPr>
+        <p:spPr>
+          <a:xfrm>
+            <a:off x="10972800" y="458470"/>
+            <a:ext cx="165100" cy="165100"/>
+          </a:xfrm>
+          <a:prstGeom prst="rect">
+            <a:avLst/>
+          </a:prstGeom>
+          <a:solidFill>
+            <a:srgbClr val="00A4EF"/>
+          </a:solidFill>
+          <a:ln>
+            <a:noFill/>
+          </a:ln>
+        </p:spPr>
+        <p:style>
+          <a:lnRef idx="1">
+            <a:schemeClr val="accent1"/>
+          </a:lnRef>
+          <a:fillRef idx="3">
+            <a:schemeClr val="accent1"/>
+          </a:fillRef>
+          <a:effectRef idx="2">
+            <a:schemeClr val="accent1"/>
+          </a:effectRef>
+          <a:fontRef idx="minor">
+            <a:schemeClr val="lt1"/>
+          </a:fontRef>
+        </p:style>
+        <p:txBody>
+          <a:bodyPr rtlCol="0" anchor="ctr"/>
+          <a:lstStyle/>
+          <a:p>
+            <a:pPr algn="ctr"/>
+          </a:p>
+        </p:txBody>
+      </p:sp>
+      <p:sp>
+        <p:nvSpPr>
+          <p:cNvPr id="6" name="Rectangle 5"/>
+          <p:cNvSpPr/>
+          <p:nvPr/>
+        </p:nvSpPr>
+        <p:spPr>
+          <a:xfrm>
+            <a:off x="11156950" y="458470"/>
+            <a:ext cx="165100" cy="165100"/>
+          </a:xfrm>
+          <a:prstGeom prst="rect">
+            <a:avLst/>
+          </a:prstGeom>
+          <a:solidFill>
+            <a:srgbClr val="FFB900"/>
+          </a:solidFill>
+          <a:ln>
+            <a:noFill/>
+          </a:ln>
+        </p:spPr>
+        <p:style>
+          <a:lnRef idx="1">
+            <a:schemeClr val="accent1"/>
+          </a:lnRef>
+          <a:fillRef idx="3">
+            <a:schemeClr val="accent1"/>
+          </a:fillRef>
+          <a:effectRef idx="2">
+            <a:schemeClr val="accent1"/>
+          </a:effectRef>
+          <a:fontRef idx="minor">
+            <a:schemeClr val="lt1"/>
+          </a:fontRef>
+        </p:style>
+        <p:txBody>
+          <a:bodyPr rtlCol="0" anchor="ctr"/>
+          <a:lstStyle/>
+          <a:p>
+            <a:pPr algn="ctr"/>
+          </a:p>
+        </p:txBody>
+      </p:sp>
+      <p:sp>
+        <p:nvSpPr>
+          <p:cNvPr id="7" name="TextBox 6"/>
+          <p:cNvSpPr txBox="1"/>
+          <p:nvPr/>
+        </p:nvSpPr>
+        <p:spPr>
+          <a:xfrm>
+            <a:off x="731520" y="457200"/>
+            <a:ext cx="5486400" cy="5029200"/>
+          </a:xfrm>
+          <a:prstGeom prst="rect">
+            <a:avLst/>
+          </a:prstGeom>
+          <a:noFill/>
+        </p:spPr>
+        <p:txBody>
+          <a:bodyPr wrap="none">
+            <a:spAutoFit/>
+          </a:bodyPr>
+          <a:lstStyle/>
+          <a:p>
+            <a:pPr algn="l">
+              <a:defRPr sz="38000" b="0">
+                <a:solidFill>
+                  <a:srgbClr val="003A70"/>
+                </a:solidFill>
+                <a:latin typeface="Segoe UI Light"/>
+              </a:defRPr>
+            </a:pPr>
+            <a:r>
+              <a:t>8</a:t>
+            </a:r>
+          </a:p>
+        </p:txBody>
+      </p:sp>
+      <p:sp>
+        <p:nvSpPr>
+          <p:cNvPr id="8" name="TextBox 7"/>
+          <p:cNvSpPr txBox="1"/>
+          <p:nvPr/>
+        </p:nvSpPr>
+        <p:spPr>
+          <a:xfrm>
+            <a:off x="914400" y="3200400"/>
+            <a:ext cx="9144000" cy="1097280"/>
+          </a:xfrm>
+          <a:prstGeom prst="rect">
+            <a:avLst/>
+          </a:prstGeom>
+          <a:noFill/>
+        </p:spPr>
+        <p:txBody>
+          <a:bodyPr wrap="square" anchor="ctr">
+            <a:spAutoFit/>
+          </a:bodyPr>
+          <a:lstStyle/>
+          <a:p>
+            <a:pPr algn="l">
+              <a:defRPr sz="5600" b="0">
+                <a:solidFill>
+                  <a:srgbClr val="FFFFFF"/>
+                </a:solidFill>
+                <a:latin typeface="Segoe UI Light"/>
+              </a:defRPr>
+            </a:pPr>
+            <a:r>
+              <a:t>Appendix</a:t>
+            </a:r>
+          </a:p>
+          <a:p>
+            <a:pPr algn="l">
+              <a:spcBef>
+                <a:spcPts val="800"/>
+              </a:spcBef>
+              <a:defRPr sz="2200">
+                <a:solidFill>
+                  <a:srgbClr val="50E6FF"/>
+                </a:solidFill>
+                <a:latin typeface="Segoe UI"/>
+              </a:defRPr>
+            </a:pPr>
+            <a:r>
+              <a:t>Reference Materials</a:t>
+            </a:r>
+          </a:p>
+        </p:txBody>
+      </p:sp>
+    </p:spTree>
+  </p:cSld>
+  <p:clrMapOvr>
+    <a:masterClrMapping/>
+  </p:clrMapOvr>
+</p:sld>
+</file>
+
+<file path=ppt/slides/slide44.xml><?xml version="1.0" encoding="utf-8"?>
 <p:sld xmlns:a="http://schemas.openxmlformats.org/drawingml/2006/main" xmlns:p="http://schemas.openxmlformats.org/presentationml/2006/main" xmlns:r="http://schemas.openxmlformats.org/officeDocument/2006/relationships">
   <p:cSld>
     <p:bg>
@@ -22944,7 +23533,7 @@
               </a:defRPr>
             </a:pPr>
             <a:r>
-              <a:t>Agent Types in Scope</a:t>
+              <a:t>Roles &amp; Responsibilities</a:t>
             </a:r>
           </a:p>
         </p:txBody>
@@ -22988,7 +23577,7 @@
               <a:buChar char="•"/>
             </a:pPr>
             <a:r>
-              <a:t>Microsoft 365 Copilot</a:t>
+              <a:t>Executive Sponsor — Approves scope, provides access, makes go/no-go decision</a:t>
             </a:r>
           </a:p>
           <a:p>
@@ -23009,7 +23598,7 @@
               <a:buChar char="•"/>
             </a:pPr>
             <a:r>
-              <a:t>Copilot Agent Builder agents</a:t>
+              <a:t>IT Admin — Configures M365 Admin Center, manages agent registry</a:t>
             </a:r>
           </a:p>
           <a:p>
@@ -23030,7 +23619,7 @@
               <a:buChar char="•"/>
             </a:pPr>
             <a:r>
-              <a:t>Copilot Studio agents</a:t>
+              <a:t>Identity Admin — Manages Entra ID agent identities, conditional access policies</a:t>
             </a:r>
           </a:p>
           <a:p>
@@ -23051,7 +23640,7 @@
               <a:buChar char="•"/>
             </a:pPr>
             <a:r>
-              <a:t>Microsoft 365 Copilot Chat</a:t>
+              <a:t>Data Security Lead — Configures Purview DLP, sensitivity labels for agents</a:t>
             </a:r>
           </a:p>
           <a:p>
@@ -23072,7 +23661,7 @@
               <a:buChar char="•"/>
             </a:pPr>
             <a:r>
-              <a:t>SharePoint agents</a:t>
+              <a:t>SOC Analyst — Monitors Defender alerts, investigates agent threats, runs response</a:t>
             </a:r>
           </a:p>
           <a:p>
@@ -23093,9 +23682,381 @@
               <a:buChar char="•"/>
             </a:pPr>
             <a:r>
-              <a:t>Azure AI Foundry agents</a:t>
-            </a:r>
-          </a:p>
+              <a:t>Business Owners — Identify agents for PoV, validate success criteria alignment</a:t>
+            </a:r>
+          </a:p>
+        </p:txBody>
+      </p:sp>
+      <p:sp>
+        <p:nvSpPr>
+          <p:cNvPr id="5" name="Rectangle 4"/>
+          <p:cNvSpPr/>
+          <p:nvPr/>
+        </p:nvSpPr>
+        <p:spPr>
+          <a:xfrm>
+            <a:off x="365760" y="6400800"/>
+            <a:ext cx="63500" cy="63500"/>
+          </a:xfrm>
+          <a:prstGeom prst="rect">
+            <a:avLst/>
+          </a:prstGeom>
+          <a:solidFill>
+            <a:srgbClr val="F25022"/>
+          </a:solidFill>
+          <a:ln>
+            <a:noFill/>
+          </a:ln>
+        </p:spPr>
+        <p:style>
+          <a:lnRef idx="1">
+            <a:schemeClr val="accent1"/>
+          </a:lnRef>
+          <a:fillRef idx="3">
+            <a:schemeClr val="accent1"/>
+          </a:fillRef>
+          <a:effectRef idx="2">
+            <a:schemeClr val="accent1"/>
+          </a:effectRef>
+          <a:fontRef idx="minor">
+            <a:schemeClr val="lt1"/>
+          </a:fontRef>
+        </p:style>
+        <p:txBody>
+          <a:bodyPr rtlCol="0" anchor="ctr"/>
+          <a:lstStyle/>
+          <a:p>
+            <a:pPr algn="ctr"/>
+          </a:p>
+        </p:txBody>
+      </p:sp>
+      <p:sp>
+        <p:nvSpPr>
+          <p:cNvPr id="6" name="Rectangle 5"/>
+          <p:cNvSpPr/>
+          <p:nvPr/>
+        </p:nvSpPr>
+        <p:spPr>
+          <a:xfrm>
+            <a:off x="448310" y="6400800"/>
+            <a:ext cx="63500" cy="63500"/>
+          </a:xfrm>
+          <a:prstGeom prst="rect">
+            <a:avLst/>
+          </a:prstGeom>
+          <a:solidFill>
+            <a:srgbClr val="7FBA00"/>
+          </a:solidFill>
+          <a:ln>
+            <a:noFill/>
+          </a:ln>
+        </p:spPr>
+        <p:style>
+          <a:lnRef idx="1">
+            <a:schemeClr val="accent1"/>
+          </a:lnRef>
+          <a:fillRef idx="3">
+            <a:schemeClr val="accent1"/>
+          </a:fillRef>
+          <a:effectRef idx="2">
+            <a:schemeClr val="accent1"/>
+          </a:effectRef>
+          <a:fontRef idx="minor">
+            <a:schemeClr val="lt1"/>
+          </a:fontRef>
+        </p:style>
+        <p:txBody>
+          <a:bodyPr rtlCol="0" anchor="ctr"/>
+          <a:lstStyle/>
+          <a:p>
+            <a:pPr algn="ctr"/>
+          </a:p>
+        </p:txBody>
+      </p:sp>
+      <p:sp>
+        <p:nvSpPr>
+          <p:cNvPr id="7" name="Rectangle 6"/>
+          <p:cNvSpPr/>
+          <p:nvPr/>
+        </p:nvSpPr>
+        <p:spPr>
+          <a:xfrm>
+            <a:off x="365760" y="6483350"/>
+            <a:ext cx="63500" cy="63500"/>
+          </a:xfrm>
+          <a:prstGeom prst="rect">
+            <a:avLst/>
+          </a:prstGeom>
+          <a:solidFill>
+            <a:srgbClr val="00A4EF"/>
+          </a:solidFill>
+          <a:ln>
+            <a:noFill/>
+          </a:ln>
+        </p:spPr>
+        <p:style>
+          <a:lnRef idx="1">
+            <a:schemeClr val="accent1"/>
+          </a:lnRef>
+          <a:fillRef idx="3">
+            <a:schemeClr val="accent1"/>
+          </a:fillRef>
+          <a:effectRef idx="2">
+            <a:schemeClr val="accent1"/>
+          </a:effectRef>
+          <a:fontRef idx="minor">
+            <a:schemeClr val="lt1"/>
+          </a:fontRef>
+        </p:style>
+        <p:txBody>
+          <a:bodyPr rtlCol="0" anchor="ctr"/>
+          <a:lstStyle/>
+          <a:p>
+            <a:pPr algn="ctr"/>
+          </a:p>
+        </p:txBody>
+      </p:sp>
+      <p:sp>
+        <p:nvSpPr>
+          <p:cNvPr id="8" name="Rectangle 7"/>
+          <p:cNvSpPr/>
+          <p:nvPr/>
+        </p:nvSpPr>
+        <p:spPr>
+          <a:xfrm>
+            <a:off x="448310" y="6483350"/>
+            <a:ext cx="63500" cy="63500"/>
+          </a:xfrm>
+          <a:prstGeom prst="rect">
+            <a:avLst/>
+          </a:prstGeom>
+          <a:solidFill>
+            <a:srgbClr val="FFB900"/>
+          </a:solidFill>
+          <a:ln>
+            <a:noFill/>
+          </a:ln>
+        </p:spPr>
+        <p:style>
+          <a:lnRef idx="1">
+            <a:schemeClr val="accent1"/>
+          </a:lnRef>
+          <a:fillRef idx="3">
+            <a:schemeClr val="accent1"/>
+          </a:fillRef>
+          <a:effectRef idx="2">
+            <a:schemeClr val="accent1"/>
+          </a:effectRef>
+          <a:fontRef idx="minor">
+            <a:schemeClr val="lt1"/>
+          </a:fontRef>
+        </p:style>
+        <p:txBody>
+          <a:bodyPr rtlCol="0" anchor="ctr"/>
+          <a:lstStyle/>
+          <a:p>
+            <a:pPr algn="ctr"/>
+          </a:p>
+        </p:txBody>
+      </p:sp>
+      <p:sp>
+        <p:nvSpPr>
+          <p:cNvPr id="9" name="TextBox 8"/>
+          <p:cNvSpPr txBox="1"/>
+          <p:nvPr/>
+        </p:nvSpPr>
+        <p:spPr>
+          <a:xfrm>
+            <a:off x="594360" y="6291072"/>
+            <a:ext cx="1371600" cy="274320"/>
+          </a:xfrm>
+          <a:prstGeom prst="rect">
+            <a:avLst/>
+          </a:prstGeom>
+          <a:noFill/>
+        </p:spPr>
+        <p:txBody>
+          <a:bodyPr wrap="none">
+            <a:spAutoFit/>
+          </a:bodyPr>
+          <a:lstStyle/>
+          <a:p>
+            <a:pPr algn="l">
+              <a:defRPr sz="1100">
+                <a:solidFill>
+                  <a:srgbClr val="000000"/>
+                </a:solidFill>
+                <a:latin typeface="Segoe UI"/>
+              </a:defRPr>
+            </a:pPr>
+            <a:r>
+              <a:t>Microsoft</a:t>
+            </a:r>
+          </a:p>
+        </p:txBody>
+      </p:sp>
+      <p:sp>
+        <p:nvSpPr>
+          <p:cNvPr id="10" name="TextBox 9"/>
+          <p:cNvSpPr txBox="1"/>
+          <p:nvPr/>
+        </p:nvSpPr>
+        <p:spPr>
+          <a:xfrm>
+            <a:off x="7772400" y="6291072"/>
+            <a:ext cx="4114800" cy="274320"/>
+          </a:xfrm>
+          <a:prstGeom prst="rect">
+            <a:avLst/>
+          </a:prstGeom>
+          <a:noFill/>
+        </p:spPr>
+        <p:txBody>
+          <a:bodyPr wrap="none">
+            <a:spAutoFit/>
+          </a:bodyPr>
+          <a:lstStyle/>
+          <a:p>
+            <a:pPr algn="r">
+              <a:defRPr sz="1000">
+                <a:solidFill>
+                  <a:srgbClr val="000000"/>
+                </a:solidFill>
+                <a:latin typeface="Segoe UI"/>
+              </a:defRPr>
+            </a:pPr>
+            <a:r>
+              <a:t>Agent 365  |  Proof of Value</a:t>
+            </a:r>
+          </a:p>
+        </p:txBody>
+      </p:sp>
+    </p:spTree>
+  </p:cSld>
+  <p:clrMapOvr>
+    <a:masterClrMapping/>
+  </p:clrMapOvr>
+</p:sld>
+</file>
+
+<file path=ppt/slides/slide45.xml><?xml version="1.0" encoding="utf-8"?>
+<p:sld xmlns:a="http://schemas.openxmlformats.org/drawingml/2006/main" xmlns:p="http://schemas.openxmlformats.org/presentationml/2006/main" xmlns:r="http://schemas.openxmlformats.org/officeDocument/2006/relationships">
+  <p:cSld>
+    <p:bg>
+      <p:bgPr>
+        <a:solidFill>
+          <a:srgbClr val="FFFFFF"/>
+        </a:solidFill>
+        <a:effectLst/>
+      </p:bgPr>
+    </p:bg>
+    <p:spTree>
+      <p:nvGrpSpPr>
+        <p:cNvPr id="1" name=""/>
+        <p:cNvGrpSpPr/>
+        <p:nvPr/>
+      </p:nvGrpSpPr>
+      <p:grpSpPr/>
+      <p:sp>
+        <p:nvSpPr>
+          <p:cNvPr id="2" name="Rectangle 1"/>
+          <p:cNvSpPr/>
+          <p:nvPr/>
+        </p:nvSpPr>
+        <p:spPr>
+          <a:xfrm>
+            <a:off x="457200" y="457200"/>
+            <a:ext cx="109220" cy="508000"/>
+          </a:xfrm>
+          <a:prstGeom prst="rect">
+            <a:avLst/>
+          </a:prstGeom>
+          <a:solidFill>
+            <a:srgbClr val="0078D4"/>
+          </a:solidFill>
+          <a:ln>
+            <a:noFill/>
+          </a:ln>
+        </p:spPr>
+        <p:style>
+          <a:lnRef idx="1">
+            <a:schemeClr val="accent1"/>
+          </a:lnRef>
+          <a:fillRef idx="3">
+            <a:schemeClr val="accent1"/>
+          </a:fillRef>
+          <a:effectRef idx="2">
+            <a:schemeClr val="accent1"/>
+          </a:effectRef>
+          <a:fontRef idx="minor">
+            <a:schemeClr val="lt1"/>
+          </a:fontRef>
+        </p:style>
+        <p:txBody>
+          <a:bodyPr rtlCol="0" anchor="ctr"/>
+          <a:lstStyle/>
+          <a:p>
+            <a:pPr algn="ctr"/>
+          </a:p>
+        </p:txBody>
+      </p:sp>
+      <p:sp>
+        <p:nvSpPr>
+          <p:cNvPr id="3" name="TextBox 2"/>
+          <p:cNvSpPr txBox="1"/>
+          <p:nvPr/>
+        </p:nvSpPr>
+        <p:spPr>
+          <a:xfrm>
+            <a:off x="658368" y="365760"/>
+            <a:ext cx="10515600" cy="640080"/>
+          </a:xfrm>
+          <a:prstGeom prst="rect">
+            <a:avLst/>
+          </a:prstGeom>
+          <a:noFill/>
+        </p:spPr>
+        <p:txBody>
+          <a:bodyPr wrap="square" anchor="ctr">
+            <a:spAutoFit/>
+          </a:bodyPr>
+          <a:lstStyle/>
+          <a:p>
+            <a:pPr algn="l">
+              <a:defRPr sz="2600" b="0">
+                <a:solidFill>
+                  <a:srgbClr val="000000"/>
+                </a:solidFill>
+                <a:latin typeface="Segoe UI Semibold"/>
+              </a:defRPr>
+            </a:pPr>
+            <a:r>
+              <a:t>Agent Types in Scope</a:t>
+            </a:r>
+          </a:p>
+        </p:txBody>
+      </p:sp>
+      <p:sp>
+        <p:nvSpPr>
+          <p:cNvPr id="4" name="TextBox 3"/>
+          <p:cNvSpPr txBox="1"/>
+          <p:nvPr/>
+        </p:nvSpPr>
+        <p:spPr>
+          <a:xfrm>
+            <a:off x="658368" y="1280160"/>
+            <a:ext cx="10515600" cy="4572000"/>
+          </a:xfrm>
+          <a:prstGeom prst="rect">
+            <a:avLst/>
+          </a:prstGeom>
+          <a:noFill/>
+        </p:spPr>
+        <p:txBody>
+          <a:bodyPr wrap="square">
+            <a:spAutoFit/>
+          </a:bodyPr>
+          <a:lstStyle/>
           <a:p>
             <a:pPr marL="228600" indent="-228600">
               <a:spcBef>
@@ -23114,6 +24075,132 @@
               <a:buChar char="•"/>
             </a:pPr>
             <a:r>
+              <a:t>Microsoft 365 Copilot</a:t>
+            </a:r>
+          </a:p>
+          <a:p>
+            <a:pPr marL="228600" indent="-228600">
+              <a:spcBef>
+                <a:spcPts val="400"/>
+              </a:spcBef>
+              <a:spcAft>
+                <a:spcPts val="1000"/>
+              </a:spcAft>
+              <a:defRPr sz="1400">
+                <a:solidFill>
+                  <a:srgbClr val="000000"/>
+                </a:solidFill>
+                <a:latin typeface="Segoe UI Semibold"/>
+              </a:defRPr>
+              <a:buFont typeface="Arial"/>
+              <a:buChar char="•"/>
+            </a:pPr>
+            <a:r>
+              <a:t>Copilot Agent Builder agents</a:t>
+            </a:r>
+          </a:p>
+          <a:p>
+            <a:pPr marL="228600" indent="-228600">
+              <a:spcBef>
+                <a:spcPts val="400"/>
+              </a:spcBef>
+              <a:spcAft>
+                <a:spcPts val="1000"/>
+              </a:spcAft>
+              <a:defRPr sz="1400">
+                <a:solidFill>
+                  <a:srgbClr val="000000"/>
+                </a:solidFill>
+                <a:latin typeface="Segoe UI Semibold"/>
+              </a:defRPr>
+              <a:buFont typeface="Arial"/>
+              <a:buChar char="•"/>
+            </a:pPr>
+            <a:r>
+              <a:t>Copilot Studio agents</a:t>
+            </a:r>
+          </a:p>
+          <a:p>
+            <a:pPr marL="228600" indent="-228600">
+              <a:spcBef>
+                <a:spcPts val="400"/>
+              </a:spcBef>
+              <a:spcAft>
+                <a:spcPts val="1000"/>
+              </a:spcAft>
+              <a:defRPr sz="1400">
+                <a:solidFill>
+                  <a:srgbClr val="000000"/>
+                </a:solidFill>
+                <a:latin typeface="Segoe UI Semibold"/>
+              </a:defRPr>
+              <a:buFont typeface="Arial"/>
+              <a:buChar char="•"/>
+            </a:pPr>
+            <a:r>
+              <a:t>Microsoft 365 Copilot Chat</a:t>
+            </a:r>
+          </a:p>
+          <a:p>
+            <a:pPr marL="228600" indent="-228600">
+              <a:spcBef>
+                <a:spcPts val="400"/>
+              </a:spcBef>
+              <a:spcAft>
+                <a:spcPts val="1000"/>
+              </a:spcAft>
+              <a:defRPr sz="1400">
+                <a:solidFill>
+                  <a:srgbClr val="000000"/>
+                </a:solidFill>
+                <a:latin typeface="Segoe UI Semibold"/>
+              </a:defRPr>
+              <a:buFont typeface="Arial"/>
+              <a:buChar char="•"/>
+            </a:pPr>
+            <a:r>
+              <a:t>SharePoint agents</a:t>
+            </a:r>
+          </a:p>
+          <a:p>
+            <a:pPr marL="228600" indent="-228600">
+              <a:spcBef>
+                <a:spcPts val="400"/>
+              </a:spcBef>
+              <a:spcAft>
+                <a:spcPts val="1000"/>
+              </a:spcAft>
+              <a:defRPr sz="1400">
+                <a:solidFill>
+                  <a:srgbClr val="000000"/>
+                </a:solidFill>
+                <a:latin typeface="Segoe UI Semibold"/>
+              </a:defRPr>
+              <a:buFont typeface="Arial"/>
+              <a:buChar char="•"/>
+            </a:pPr>
+            <a:r>
+              <a:t>Azure AI Foundry agents</a:t>
+            </a:r>
+          </a:p>
+          <a:p>
+            <a:pPr marL="228600" indent="-228600">
+              <a:spcBef>
+                <a:spcPts val="400"/>
+              </a:spcBef>
+              <a:spcAft>
+                <a:spcPts val="1000"/>
+              </a:spcAft>
+              <a:defRPr sz="1400">
+                <a:solidFill>
+                  <a:srgbClr val="000000"/>
+                </a:solidFill>
+                <a:latin typeface="Segoe UI Semibold"/>
+              </a:defRPr>
+              <a:buFont typeface="Arial"/>
+              <a:buChar char="•"/>
+            </a:pPr>
+            <a:r>
               <a:t>First-party Microsoft agents</a:t>
             </a:r>
           </a:p>
@@ -23371,7 +24458,7 @@
 </p:sld>
 </file>
 
-<file path=ppt/slides/slide44.xml><?xml version="1.0" encoding="utf-8"?>
+<file path=ppt/slides/slide46.xml><?xml version="1.0" encoding="utf-8"?>
 <p:sld xmlns:a="http://schemas.openxmlformats.org/drawingml/2006/main" xmlns:p="http://schemas.openxmlformats.org/presentationml/2006/main" xmlns:r="http://schemas.openxmlformats.org/officeDocument/2006/relationships">
   <p:cSld>
     <p:bg>
